--- a/Poster.pptx
+++ b/Poster.pptx
@@ -3162,7 +3162,7 @@
         <p:spPr>
           <a:xfrm>
             <a:off x="24335961" y="5658025"/>
-            <a:ext cx="10504800" cy="17877600"/>
+            <a:ext cx="10504800" cy="18558286"/>
           </a:xfrm>
           <a:prstGeom prst="rect">
             <a:avLst/>
@@ -3207,7 +3207,7 @@
                 <a:ea typeface="+mn-ea"/>
                 <a:cs typeface="+mn-cs"/>
               </a:rPr>
-              <a:t>Conclusions</a:t>
+              <a:t>Results</a:t>
             </a:r>
           </a:p>
           <a:p>
@@ -4304,7 +4304,7 @@
         </p:nvSpPr>
         <p:spPr>
           <a:xfrm>
-            <a:off x="827246" y="5658025"/>
+            <a:off x="827246" y="5466624"/>
             <a:ext cx="11160000" cy="17828842"/>
           </a:xfrm>
           <a:prstGeom prst="rect">
@@ -4340,82 +4340,455 @@
           <a:lstStyle/>
           <a:p>
             <a:pPr algn="ctr"/>
-            <a:endParaRPr lang="en-US" sz="3037"/>
-          </a:p>
-        </p:txBody>
-      </p:sp>
-      <p:sp>
-        <p:nvSpPr>
-          <p:cNvPr id="31" name="TextBox 30">
-            <a:extLst>
-              <a:ext uri="{FF2B5EF4-FFF2-40B4-BE49-F238E27FC236}">
-                <a16:creationId xmlns:a16="http://schemas.microsoft.com/office/drawing/2014/main" id="{FB82CFC1-305C-A411-B1FF-DD54AA94EB29}"/>
-              </a:ext>
-            </a:extLst>
-          </p:cNvPr>
-          <p:cNvSpPr txBox="1"/>
-          <p:nvPr/>
-        </p:nvSpPr>
-        <p:spPr>
-          <a:xfrm>
-            <a:off x="1158977" y="5658025"/>
-            <a:ext cx="10503375" cy="3956211"/>
-          </a:xfrm>
-          <a:prstGeom prst="rect">
-            <a:avLst/>
-          </a:prstGeom>
-          <a:noFill/>
-        </p:spPr>
-        <p:txBody>
-          <a:bodyPr wrap="square" rtlCol="0">
-            <a:spAutoFit/>
-          </a:bodyPr>
-          <a:lstStyle/>
-          <a:p>
-            <a:pPr lvl="0" algn="ctr" defTabSz="2519995">
-              <a:defRPr/>
-            </a:pPr>
-            <a:r>
-              <a:rPr lang="en-US" sz="5654" b="1" dirty="0">
-                <a:latin typeface="Georgia" panose="02040502050405020303" pitchFamily="18" charset="0"/>
-              </a:rPr>
-              <a:t>Introduction</a:t>
-            </a:r>
-          </a:p>
-          <a:p>
-            <a:pPr lvl="0" algn="just" defTabSz="2519995">
-              <a:defRPr/>
-            </a:pPr>
-            <a:endParaRPr lang="en-US" sz="3400" b="1" dirty="0">
-              <a:latin typeface="Georgia" panose="02040502050405020303" pitchFamily="18" charset="0"/>
+            <a:endParaRPr lang="en-US" sz="3400" dirty="0">
+              <a:solidFill>
+                <a:schemeClr val="tx1"/>
+              </a:solidFill>
+              <a:latin typeface="Calibri" panose="020F0502020204030204" pitchFamily="34" charset="0"/>
+              <a:ea typeface="Calibri" panose="020F0502020204030204" pitchFamily="34" charset="0"/>
+              <a:cs typeface="Calibri" panose="020F0502020204030204" pitchFamily="34" charset="0"/>
             </a:endParaRPr>
           </a:p>
-          <a:p>
-            <a:pPr lvl="0" algn="ctr" defTabSz="2519995">
-              <a:defRPr/>
-            </a:pPr>
-            <a:r>
-              <a:rPr lang="en-US" sz="5654" b="1" dirty="0">
-                <a:latin typeface="Georgia" panose="02040502050405020303" pitchFamily="18" charset="0"/>
-              </a:rPr>
-              <a:t>Motivation</a:t>
-            </a:r>
-          </a:p>
-          <a:p>
-            <a:pPr lvl="0" algn="just" defTabSz="2519995">
-              <a:defRPr/>
-            </a:pPr>
-            <a:r>
-              <a:rPr lang="en-US" sz="3400" dirty="0">
-                <a:latin typeface="Calibri" panose="020F0502020204030204" pitchFamily="34" charset="0"/>
-                <a:ea typeface="Calibri" panose="020F0502020204030204" pitchFamily="34" charset="0"/>
-                <a:cs typeface="Calibri" panose="020F0502020204030204" pitchFamily="34" charset="0"/>
-              </a:rPr>
-              <a:t>Here we can also see an example, that we must end this section in this column as the next section opens the next column.</a:t>
-            </a:r>
-          </a:p>
-        </p:txBody>
-      </p:sp>
+        </p:txBody>
+      </p:sp>
+      <mc:AlternateContent xmlns:mc="http://schemas.openxmlformats.org/markup-compatibility/2006">
+        <mc:Choice xmlns:a14="http://schemas.microsoft.com/office/drawing/2010/main" Requires="a14">
+          <p:sp>
+            <p:nvSpPr>
+              <p:cNvPr id="31" name="TextBox 30">
+                <a:extLst>
+                  <a:ext uri="{FF2B5EF4-FFF2-40B4-BE49-F238E27FC236}">
+                    <a16:creationId xmlns:a16="http://schemas.microsoft.com/office/drawing/2014/main" id="{FB82CFC1-305C-A411-B1FF-DD54AA94EB29}"/>
+                  </a:ext>
+                </a:extLst>
+              </p:cNvPr>
+              <p:cNvSpPr txBox="1"/>
+              <p:nvPr/>
+            </p:nvSpPr>
+            <p:spPr>
+              <a:xfrm>
+                <a:off x="1158977" y="5658025"/>
+                <a:ext cx="10503375" cy="19391078"/>
+              </a:xfrm>
+              <a:prstGeom prst="rect">
+                <a:avLst/>
+              </a:prstGeom>
+              <a:noFill/>
+            </p:spPr>
+            <p:txBody>
+              <a:bodyPr wrap="square" rtlCol="0">
+                <a:spAutoFit/>
+              </a:bodyPr>
+              <a:lstStyle/>
+              <a:p>
+                <a:pPr lvl="0" algn="ctr" defTabSz="2519995">
+                  <a:defRPr/>
+                </a:pPr>
+                <a:r>
+                  <a:rPr lang="en-US" sz="5654" b="1" dirty="0">
+                    <a:latin typeface="Georgia" panose="02040502050405020303" pitchFamily="18" charset="0"/>
+                  </a:rPr>
+                  <a:t>Introduction</a:t>
+                </a:r>
+              </a:p>
+              <a:p>
+                <a:pPr lvl="0" algn="just" defTabSz="2519995">
+                  <a:defRPr/>
+                </a:pPr>
+                <a:r>
+                  <a:rPr lang="en-US" sz="3400" dirty="0">
+                    <a:latin typeface="Calibri" panose="020F0502020204030204" pitchFamily="34" charset="0"/>
+                    <a:ea typeface="Calibri" panose="020F0502020204030204" pitchFamily="34" charset="0"/>
+                    <a:cs typeface="Calibri" panose="020F0502020204030204" pitchFamily="34" charset="0"/>
+                  </a:rPr>
+                  <a:t>In our project, we want to adjust a simple rhythmic song – like “Seven Nation Army” to match the simulated steps of a runner, during his various workouts.</a:t>
+                </a:r>
+              </a:p>
+              <a:p>
+                <a:pPr lvl="0" algn="just" defTabSz="2519995">
+                  <a:defRPr/>
+                </a:pPr>
+                <a:r>
+                  <a:rPr lang="en-US" sz="3400" dirty="0">
+                    <a:latin typeface="Calibri" panose="020F0502020204030204" pitchFamily="34" charset="0"/>
+                    <a:ea typeface="Calibri" panose="020F0502020204030204" pitchFamily="34" charset="0"/>
+                    <a:cs typeface="Calibri" panose="020F0502020204030204" pitchFamily="34" charset="0"/>
+                  </a:rPr>
+                  <a:t>This is done by using DSP algorithms, to find the optimal speed-up/speed-down rate, and to stretch the audio by the best value, while keeping the pitch of the original song. These algorithms are implemented in python.</a:t>
+                </a:r>
+              </a:p>
+              <a:p>
+                <a:pPr lvl="0" algn="just" defTabSz="2519995">
+                  <a:defRPr/>
+                </a:pPr>
+                <a:endParaRPr lang="en-US" sz="3400" dirty="0">
+                  <a:latin typeface="Calibri" panose="020F0502020204030204" pitchFamily="34" charset="0"/>
+                  <a:ea typeface="Calibri" panose="020F0502020204030204" pitchFamily="34" charset="0"/>
+                  <a:cs typeface="Calibri" panose="020F0502020204030204" pitchFamily="34" charset="0"/>
+                </a:endParaRPr>
+              </a:p>
+              <a:p>
+                <a:pPr lvl="0" algn="ctr" defTabSz="2519995">
+                  <a:defRPr/>
+                </a:pPr>
+                <a:r>
+                  <a:rPr lang="en-US" sz="5654" b="1" dirty="0">
+                    <a:latin typeface="Georgia" panose="02040502050405020303" pitchFamily="18" charset="0"/>
+                  </a:rPr>
+                  <a:t>Motivation</a:t>
+                </a:r>
+              </a:p>
+              <a:p>
+                <a:pPr lvl="0" algn="just" defTabSz="2519995">
+                  <a:defRPr/>
+                </a:pPr>
+                <a:r>
+                  <a:rPr lang="en-US" sz="3400" dirty="0">
+                    <a:latin typeface="Calibri" panose="020F0502020204030204" pitchFamily="34" charset="0"/>
+                    <a:ea typeface="Calibri" panose="020F0502020204030204" pitchFamily="34" charset="0"/>
+                    <a:cs typeface="Calibri" panose="020F0502020204030204" pitchFamily="34" charset="0"/>
+                  </a:rPr>
+                  <a:t>We want to give the runner smoother running experience. Because in reality, most of the songs are slower than the average runner pace.</a:t>
+                </a:r>
+              </a:p>
+              <a:p>
+                <a:pPr lvl="0" algn="just" defTabSz="2519995">
+                  <a:defRPr/>
+                </a:pPr>
+                <a:endParaRPr lang="en-US" sz="3400" dirty="0">
+                  <a:latin typeface="Calibri" panose="020F0502020204030204" pitchFamily="34" charset="0"/>
+                  <a:ea typeface="Calibri" panose="020F0502020204030204" pitchFamily="34" charset="0"/>
+                  <a:cs typeface="Calibri" panose="020F0502020204030204" pitchFamily="34" charset="0"/>
+                </a:endParaRPr>
+              </a:p>
+              <a:p>
+                <a:pPr algn="ctr"/>
+                <a:r>
+                  <a:rPr lang="en-US" sz="6600" b="1" dirty="0">
+                    <a:latin typeface="Georgia" panose="02040502050405020303" pitchFamily="18" charset="0"/>
+                  </a:rPr>
+                  <a:t>Implementation</a:t>
+                </a:r>
+              </a:p>
+              <a:p>
+                <a:endParaRPr lang="en-US" sz="3600" dirty="0"/>
+              </a:p>
+              <a:p>
+                <a:endParaRPr lang="en-US" sz="3600" dirty="0"/>
+              </a:p>
+              <a:p>
+                <a:endParaRPr lang="en-US" sz="3600" dirty="0"/>
+              </a:p>
+              <a:p>
+                <a:endParaRPr lang="en-US" sz="3600" dirty="0"/>
+              </a:p>
+              <a:p>
+                <a:endParaRPr lang="en-US" sz="3600" dirty="0"/>
+              </a:p>
+              <a:p>
+                <a:endParaRPr lang="en-US" sz="3600" dirty="0"/>
+              </a:p>
+              <a:p>
+                <a:endParaRPr lang="en-US" sz="3600" dirty="0"/>
+              </a:p>
+              <a:p>
+                <a:r>
+                  <a:rPr lang="en-US" sz="3400" b="1" dirty="0"/>
+                  <a:t>Pre-processing: </a:t>
+                </a:r>
+                <a:r>
+                  <a:rPr lang="en-US" sz="3400" dirty="0"/>
+                  <a:t>First, we make 2 time-stamped vectors – One is the extracted song beats time stamps, and the other is simulated run steps time samps.</a:t>
+                </a:r>
+                <a:endParaRPr lang="en-US" sz="3400" dirty="0">
+                  <a:latin typeface="Calibri" panose="020F0502020204030204" pitchFamily="34" charset="0"/>
+                  <a:ea typeface="Calibri" panose="020F0502020204030204" pitchFamily="34" charset="0"/>
+                  <a:cs typeface="Calibri" panose="020F0502020204030204" pitchFamily="34" charset="0"/>
+                </a:endParaRPr>
+              </a:p>
+              <a:p>
+                <a:endParaRPr lang="en-US" sz="3400" dirty="0">
+                  <a:latin typeface="Calibri" panose="020F0502020204030204" pitchFamily="34" charset="0"/>
+                  <a:ea typeface="Calibri" panose="020F0502020204030204" pitchFamily="34" charset="0"/>
+                  <a:cs typeface="Calibri" panose="020F0502020204030204" pitchFamily="34" charset="0"/>
+                </a:endParaRPr>
+              </a:p>
+              <a:p>
+                <a:r>
+                  <a:rPr lang="en-US" sz="3400" dirty="0">
+                    <a:latin typeface="Calibri" panose="020F0502020204030204" pitchFamily="34" charset="0"/>
+                    <a:ea typeface="Calibri" panose="020F0502020204030204" pitchFamily="34" charset="0"/>
+                    <a:cs typeface="Calibri" panose="020F0502020204030204" pitchFamily="34" charset="0"/>
+                  </a:rPr>
+                  <a:t>Then we do beat alignment - divide those vectors in segments of 2.5 seconds, and find the best speed-up ratio for each segment, in terms of L1 distance.</a:t>
+                </a:r>
+              </a:p>
+              <a:p>
+                <a14:m>
+                  <m:oMathPara xmlns:m="http://schemas.openxmlformats.org/officeDocument/2006/math">
+                    <m:oMathParaPr>
+                      <m:jc m:val="centerGroup"/>
+                    </m:oMathParaPr>
+                    <m:oMath xmlns:m="http://schemas.openxmlformats.org/officeDocument/2006/math">
+                      <m:r>
+                        <a:rPr lang="en-US" sz="3400" b="0" i="1" smtClean="0">
+                          <a:latin typeface="Cambria Math" panose="02040503050406030204" pitchFamily="18" charset="0"/>
+                          <a:ea typeface="Calibri" panose="020F0502020204030204" pitchFamily="34" charset="0"/>
+                          <a:cs typeface="Calibri" panose="020F0502020204030204" pitchFamily="34" charset="0"/>
+                        </a:rPr>
+                        <m:t>𝐿</m:t>
+                      </m:r>
+                      <m:r>
+                        <a:rPr lang="en-US" sz="3400" b="0" i="1" smtClean="0">
+                          <a:latin typeface="Cambria Math" panose="02040503050406030204" pitchFamily="18" charset="0"/>
+                          <a:ea typeface="Calibri" panose="020F0502020204030204" pitchFamily="34" charset="0"/>
+                          <a:cs typeface="Calibri" panose="020F0502020204030204" pitchFamily="34" charset="0"/>
+                        </a:rPr>
+                        <m:t>1</m:t>
+                      </m:r>
+                      <m:r>
+                        <a:rPr lang="en-US" sz="3400" b="0" i="1" smtClean="0">
+                          <a:latin typeface="Cambria Math" panose="02040503050406030204" pitchFamily="18" charset="0"/>
+                          <a:ea typeface="Calibri" panose="020F0502020204030204" pitchFamily="34" charset="0"/>
+                          <a:cs typeface="Calibri" panose="020F0502020204030204" pitchFamily="34" charset="0"/>
+                        </a:rPr>
+                        <m:t>:</m:t>
+                      </m:r>
+                      <m:sSub>
+                        <m:sSubPr>
+                          <m:ctrlPr>
+                            <a:rPr lang="en-US" sz="3400" b="0" i="1" smtClean="0">
+                              <a:latin typeface="Cambria Math" panose="02040503050406030204" pitchFamily="18" charset="0"/>
+                              <a:ea typeface="Calibri" panose="020F0502020204030204" pitchFamily="34" charset="0"/>
+                              <a:cs typeface="Calibri" panose="020F0502020204030204" pitchFamily="34" charset="0"/>
+                            </a:rPr>
+                          </m:ctrlPr>
+                        </m:sSubPr>
+                        <m:e>
+                          <m:r>
+                            <a:rPr lang="en-US" sz="3400" b="0" i="1" smtClean="0">
+                              <a:latin typeface="Cambria Math" panose="02040503050406030204" pitchFamily="18" charset="0"/>
+                              <a:ea typeface="Calibri" panose="020F0502020204030204" pitchFamily="34" charset="0"/>
+                              <a:cs typeface="Calibri" panose="020F0502020204030204" pitchFamily="34" charset="0"/>
+                            </a:rPr>
+                            <m:t>𝑎𝑟𝑔𝑚𝑖𝑛</m:t>
+                          </m:r>
+                        </m:e>
+                        <m:sub>
+                          <m:r>
+                            <a:rPr lang="en-US" sz="3400" b="0" i="1" smtClean="0">
+                              <a:latin typeface="Cambria Math" panose="02040503050406030204" pitchFamily="18" charset="0"/>
+                              <a:ea typeface="Calibri" panose="020F0502020204030204" pitchFamily="34" charset="0"/>
+                              <a:cs typeface="Calibri" panose="020F0502020204030204" pitchFamily="34" charset="0"/>
+                            </a:rPr>
+                            <m:t>𝑟</m:t>
+                          </m:r>
+                        </m:sub>
+                      </m:sSub>
+                      <m:r>
+                        <a:rPr lang="en-US" sz="3400" b="0" i="1" smtClean="0">
+                          <a:latin typeface="Cambria Math" panose="02040503050406030204" pitchFamily="18" charset="0"/>
+                          <a:ea typeface="Calibri" panose="020F0502020204030204" pitchFamily="34" charset="0"/>
+                          <a:cs typeface="Calibri" panose="020F0502020204030204" pitchFamily="34" charset="0"/>
+                        </a:rPr>
+                        <m:t>{</m:t>
+                      </m:r>
+                      <m:acc>
+                        <m:accPr>
+                          <m:chr m:val="⃗"/>
+                          <m:ctrlPr>
+                            <a:rPr lang="en-US" sz="3400" b="0" i="1" smtClean="0">
+                              <a:latin typeface="Cambria Math" panose="02040503050406030204" pitchFamily="18" charset="0"/>
+                              <a:ea typeface="Calibri" panose="020F0502020204030204" pitchFamily="34" charset="0"/>
+                              <a:cs typeface="Calibri" panose="020F0502020204030204" pitchFamily="34" charset="0"/>
+                            </a:rPr>
+                          </m:ctrlPr>
+                        </m:accPr>
+                        <m:e>
+                          <m:r>
+                            <a:rPr lang="en-US" sz="3400" b="0" i="1" smtClean="0">
+                              <a:latin typeface="Cambria Math" panose="02040503050406030204" pitchFamily="18" charset="0"/>
+                              <a:ea typeface="Calibri" panose="020F0502020204030204" pitchFamily="34" charset="0"/>
+                              <a:cs typeface="Calibri" panose="020F0502020204030204" pitchFamily="34" charset="0"/>
+                            </a:rPr>
+                            <m:t>𝑏𝑒𝑎𝑡𝑠</m:t>
+                          </m:r>
+                        </m:e>
+                      </m:acc>
+                      <m:r>
+                        <a:rPr lang="en-US" sz="3400" b="0" i="1" smtClean="0">
+                          <a:latin typeface="Cambria Math" panose="02040503050406030204" pitchFamily="18" charset="0"/>
+                          <a:ea typeface="Calibri" panose="020F0502020204030204" pitchFamily="34" charset="0"/>
+                          <a:cs typeface="Calibri" panose="020F0502020204030204" pitchFamily="34" charset="0"/>
+                        </a:rPr>
+                        <m:t>−</m:t>
+                      </m:r>
+                      <m:sSub>
+                        <m:sSubPr>
+                          <m:ctrlPr>
+                            <a:rPr lang="en-US" sz="3400" b="0" i="1" smtClean="0">
+                              <a:latin typeface="Cambria Math" panose="02040503050406030204" pitchFamily="18" charset="0"/>
+                              <a:ea typeface="Calibri" panose="020F0502020204030204" pitchFamily="34" charset="0"/>
+                              <a:cs typeface="Calibri" panose="020F0502020204030204" pitchFamily="34" charset="0"/>
+                            </a:rPr>
+                          </m:ctrlPr>
+                        </m:sSubPr>
+                        <m:e>
+                          <m:r>
+                            <a:rPr lang="en-US" sz="3400" b="0" i="1" smtClean="0">
+                              <a:latin typeface="Cambria Math" panose="02040503050406030204" pitchFamily="18" charset="0"/>
+                              <a:ea typeface="Calibri" panose="020F0502020204030204" pitchFamily="34" charset="0"/>
+                              <a:cs typeface="Calibri" panose="020F0502020204030204" pitchFamily="34" charset="0"/>
+                            </a:rPr>
+                            <m:t>𝑟</m:t>
+                          </m:r>
+                        </m:e>
+                        <m:sub>
+                          <m:r>
+                            <a:rPr lang="en-US" sz="3400" b="0" i="1" smtClean="0">
+                              <a:latin typeface="Cambria Math" panose="02040503050406030204" pitchFamily="18" charset="0"/>
+                              <a:ea typeface="Calibri" panose="020F0502020204030204" pitchFamily="34" charset="0"/>
+                              <a:cs typeface="Calibri" panose="020F0502020204030204" pitchFamily="34" charset="0"/>
+                            </a:rPr>
+                            <m:t>𝑠𝑝𝑒𝑒𝑑</m:t>
+                          </m:r>
+                          <m:r>
+                            <a:rPr lang="en-US" sz="3400" b="0" i="1" smtClean="0">
+                              <a:latin typeface="Cambria Math" panose="02040503050406030204" pitchFamily="18" charset="0"/>
+                              <a:ea typeface="Calibri" panose="020F0502020204030204" pitchFamily="34" charset="0"/>
+                              <a:cs typeface="Calibri" panose="020F0502020204030204" pitchFamily="34" charset="0"/>
+                            </a:rPr>
+                            <m:t>−</m:t>
+                          </m:r>
+                          <m:r>
+                            <a:rPr lang="en-US" sz="3400" b="0" i="1" smtClean="0">
+                              <a:latin typeface="Cambria Math" panose="02040503050406030204" pitchFamily="18" charset="0"/>
+                              <a:ea typeface="Calibri" panose="020F0502020204030204" pitchFamily="34" charset="0"/>
+                              <a:cs typeface="Calibri" panose="020F0502020204030204" pitchFamily="34" charset="0"/>
+                            </a:rPr>
+                            <m:t>𝑢𝑝</m:t>
+                          </m:r>
+                        </m:sub>
+                      </m:sSub>
+                      <m:r>
+                        <a:rPr lang="en-US" sz="3400" b="0" i="1" smtClean="0">
+                          <a:latin typeface="Cambria Math" panose="02040503050406030204" pitchFamily="18" charset="0"/>
+                          <a:ea typeface="Calibri" panose="020F0502020204030204" pitchFamily="34" charset="0"/>
+                          <a:cs typeface="Calibri" panose="020F0502020204030204" pitchFamily="34" charset="0"/>
+                        </a:rPr>
+                        <m:t>∗</m:t>
+                      </m:r>
+                      <m:acc>
+                        <m:accPr>
+                          <m:chr m:val="⃗"/>
+                          <m:ctrlPr>
+                            <a:rPr lang="en-US" sz="3400" b="0" i="1" smtClean="0">
+                              <a:latin typeface="Cambria Math" panose="02040503050406030204" pitchFamily="18" charset="0"/>
+                              <a:ea typeface="Calibri" panose="020F0502020204030204" pitchFamily="34" charset="0"/>
+                              <a:cs typeface="Calibri" panose="020F0502020204030204" pitchFamily="34" charset="0"/>
+                            </a:rPr>
+                          </m:ctrlPr>
+                        </m:accPr>
+                        <m:e>
+                          <m:r>
+                            <a:rPr lang="en-US" sz="3400" b="0" i="1" smtClean="0">
+                              <a:latin typeface="Cambria Math" panose="02040503050406030204" pitchFamily="18" charset="0"/>
+                              <a:ea typeface="Calibri" panose="020F0502020204030204" pitchFamily="34" charset="0"/>
+                              <a:cs typeface="Calibri" panose="020F0502020204030204" pitchFamily="34" charset="0"/>
+                            </a:rPr>
+                            <m:t>𝑠𝑡𝑒𝑝𝑠</m:t>
+                          </m:r>
+                        </m:e>
+                      </m:acc>
+                      <m:r>
+                        <a:rPr lang="en-US" sz="3400" b="0" i="1" smtClean="0">
+                          <a:latin typeface="Cambria Math" panose="02040503050406030204" pitchFamily="18" charset="0"/>
+                          <a:ea typeface="Calibri" panose="020F0502020204030204" pitchFamily="34" charset="0"/>
+                          <a:cs typeface="Calibri" panose="020F0502020204030204" pitchFamily="34" charset="0"/>
+                        </a:rPr>
+                        <m:t>}</m:t>
+                      </m:r>
+                    </m:oMath>
+                  </m:oMathPara>
+                </a14:m>
+                <a:endParaRPr lang="en-US" sz="3400" dirty="0">
+                  <a:latin typeface="Calibri" panose="020F0502020204030204" pitchFamily="34" charset="0"/>
+                  <a:ea typeface="Calibri" panose="020F0502020204030204" pitchFamily="34" charset="0"/>
+                  <a:cs typeface="Calibri" panose="020F0502020204030204" pitchFamily="34" charset="0"/>
+                </a:endParaRPr>
+              </a:p>
+              <a:p>
+                <a:endParaRPr lang="en-US" sz="3400" dirty="0">
+                  <a:latin typeface="Calibri" panose="020F0502020204030204" pitchFamily="34" charset="0"/>
+                  <a:ea typeface="Calibri" panose="020F0502020204030204" pitchFamily="34" charset="0"/>
+                  <a:cs typeface="Calibri" panose="020F0502020204030204" pitchFamily="34" charset="0"/>
+                </a:endParaRPr>
+              </a:p>
+              <a:p>
+                <a:endParaRPr lang="en-US" sz="3400" dirty="0">
+                  <a:latin typeface="Calibri" panose="020F0502020204030204" pitchFamily="34" charset="0"/>
+                  <a:ea typeface="Calibri" panose="020F0502020204030204" pitchFamily="34" charset="0"/>
+                  <a:cs typeface="Calibri" panose="020F0502020204030204" pitchFamily="34" charset="0"/>
+                </a:endParaRPr>
+              </a:p>
+              <a:p>
+                <a:pPr lvl="0" algn="just" defTabSz="2519995">
+                  <a:defRPr/>
+                </a:pPr>
+                <a:endParaRPr lang="en-US" sz="3400" dirty="0">
+                  <a:latin typeface="Calibri" panose="020F0502020204030204" pitchFamily="34" charset="0"/>
+                  <a:ea typeface="Calibri" panose="020F0502020204030204" pitchFamily="34" charset="0"/>
+                  <a:cs typeface="Calibri" panose="020F0502020204030204" pitchFamily="34" charset="0"/>
+                </a:endParaRPr>
+              </a:p>
+            </p:txBody>
+          </p:sp>
+        </mc:Choice>
+        <mc:Fallback>
+          <p:sp>
+            <p:nvSpPr>
+              <p:cNvPr id="31" name="TextBox 30">
+                <a:extLst>
+                  <a:ext uri="{FF2B5EF4-FFF2-40B4-BE49-F238E27FC236}">
+                    <a16:creationId xmlns:a16="http://schemas.microsoft.com/office/drawing/2014/main" id="{FB82CFC1-305C-A411-B1FF-DD54AA94EB29}"/>
+                  </a:ext>
+                </a:extLst>
+              </p:cNvPr>
+              <p:cNvSpPr txBox="1">
+                <a:spLocks noRot="1" noChangeAspect="1" noMove="1" noResize="1" noEditPoints="1" noAdjustHandles="1" noChangeArrowheads="1" noChangeShapeType="1" noTextEdit="1"/>
+              </p:cNvSpPr>
+              <p:nvPr/>
+            </p:nvSpPr>
+            <p:spPr>
+              <a:xfrm>
+                <a:off x="1158977" y="5658025"/>
+                <a:ext cx="10503375" cy="19391078"/>
+              </a:xfrm>
+              <a:prstGeom prst="rect">
+                <a:avLst/>
+              </a:prstGeom>
+              <a:blipFill>
+                <a:blip r:embed="rId6"/>
+                <a:stretch>
+                  <a:fillRect l="-1625" t="-880" r="-1625"/>
+                </a:stretch>
+              </a:blipFill>
+            </p:spPr>
+            <p:txBody>
+              <a:bodyPr/>
+              <a:lstStyle/>
+              <a:p>
+                <a:r>
+                  <a:rPr lang="en-IL">
+                    <a:noFill/>
+                  </a:rPr>
+                  <a:t> </a:t>
+                </a:r>
+              </a:p>
+            </p:txBody>
+          </p:sp>
+        </mc:Fallback>
+      </mc:AlternateContent>
       <p:sp>
         <p:nvSpPr>
           <p:cNvPr id="10" name="Rectangle 9">
@@ -4487,7 +4860,7 @@
         <p:spPr>
           <a:xfrm>
             <a:off x="12579899" y="5690835"/>
-            <a:ext cx="10504800" cy="17877600"/>
+            <a:ext cx="10504800" cy="15077846"/>
           </a:xfrm>
           <a:prstGeom prst="rect">
             <a:avLst/>
@@ -4499,43 +4872,6 @@
             <a:spAutoFit/>
           </a:bodyPr>
           <a:lstStyle/>
-          <a:p>
-            <a:pPr lvl="0" algn="ctr" defTabSz="2519995">
-              <a:defRPr/>
-            </a:pPr>
-            <a:r>
-              <a:rPr lang="en-US" sz="5654" b="1" dirty="0">
-                <a:latin typeface="Georgia" panose="02040502050405020303" pitchFamily="18" charset="0"/>
-              </a:rPr>
-              <a:t>Implementation</a:t>
-            </a:r>
-          </a:p>
-          <a:p>
-            <a:pPr lvl="0" algn="just" defTabSz="2519995">
-              <a:defRPr/>
-            </a:pPr>
-            <a:r>
-              <a:rPr lang="en-US" sz="3400" dirty="0">
-                <a:latin typeface="Calibri" panose="020F0502020204030204" pitchFamily="34" charset="0"/>
-                <a:ea typeface="Calibri" panose="020F0502020204030204" pitchFamily="34" charset="0"/>
-                <a:cs typeface="Calibri" panose="020F0502020204030204" pitchFamily="34" charset="0"/>
-              </a:rPr>
-              <a:t>Here we can see an example of text followed by an example block diagram that helps in presenting the project implementation. You may also include formulas, images, designs etc..</a:t>
-            </a:r>
-          </a:p>
-          <a:p>
-            <a:pPr lvl="0" algn="just" defTabSz="2519995">
-              <a:defRPr/>
-            </a:pPr>
-            <a:r>
-              <a:rPr lang="en-US" sz="3400" dirty="0">
-                <a:latin typeface="Calibri" panose="020F0502020204030204" pitchFamily="34" charset="0"/>
-                <a:ea typeface="Calibri" panose="020F0502020204030204" pitchFamily="34" charset="0"/>
-                <a:cs typeface="Calibri" panose="020F0502020204030204" pitchFamily="34" charset="0"/>
-              </a:rPr>
-              <a:t>Make sure those are readable and with reasonable font sizes.</a:t>
-            </a:r>
-          </a:p>
           <a:p>
             <a:pPr lvl="0" algn="just" defTabSz="2519995">
               <a:defRPr/>
@@ -4590,28 +4926,65 @@
             <a:pPr lvl="0" algn="ctr" defTabSz="2519995">
               <a:defRPr/>
             </a:pPr>
-            <a:r>
-              <a:rPr lang="en-US" sz="5654" b="1" dirty="0">
-                <a:latin typeface="Georgia" panose="02040502050405020303" pitchFamily="18" charset="0"/>
-              </a:rPr>
-              <a:t>Results</a:t>
-            </a:r>
-          </a:p>
-          <a:p>
-            <a:pPr lvl="0" algn="just" defTabSz="2519995">
+            <a:endParaRPr lang="en-US" sz="5654" b="1" dirty="0">
+              <a:latin typeface="Georgia" panose="02040502050405020303" pitchFamily="18" charset="0"/>
+            </a:endParaRPr>
+          </a:p>
+          <a:p>
+            <a:pPr lvl="0" defTabSz="2519995">
               <a:defRPr/>
             </a:pPr>
+            <a:r>
+              <a:rPr lang="en-US" sz="3400" b="1" dirty="0">
+                <a:latin typeface="Calibri" panose="020F0502020204030204" pitchFamily="34" charset="0"/>
+                <a:ea typeface="Calibri" panose="020F0502020204030204" pitchFamily="34" charset="0"/>
+                <a:cs typeface="Calibri" panose="020F0502020204030204" pitchFamily="34" charset="0"/>
+              </a:rPr>
+              <a:t>HPS (Harmonic-Precussive </a:t>
+            </a:r>
+            <a:r>
+              <a:rPr lang="en-US" sz="3400" b="1" dirty="0" err="1">
+                <a:latin typeface="Calibri" panose="020F0502020204030204" pitchFamily="34" charset="0"/>
+                <a:ea typeface="Calibri" panose="020F0502020204030204" pitchFamily="34" charset="0"/>
+                <a:cs typeface="Calibri" panose="020F0502020204030204" pitchFamily="34" charset="0"/>
+              </a:rPr>
+              <a:t>Seperation</a:t>
+            </a:r>
+            <a:r>
+              <a:rPr lang="en-US" sz="3400" b="1" dirty="0">
+                <a:latin typeface="Calibri" panose="020F0502020204030204" pitchFamily="34" charset="0"/>
+                <a:ea typeface="Calibri" panose="020F0502020204030204" pitchFamily="34" charset="0"/>
+                <a:cs typeface="Calibri" panose="020F0502020204030204" pitchFamily="34" charset="0"/>
+              </a:rPr>
+              <a:t>):</a:t>
+            </a:r>
             <a:r>
               <a:rPr lang="en-US" sz="3400" dirty="0">
                 <a:latin typeface="Calibri" panose="020F0502020204030204" pitchFamily="34" charset="0"/>
                 <a:ea typeface="Calibri" panose="020F0502020204030204" pitchFamily="34" charset="0"/>
                 <a:cs typeface="Calibri" panose="020F0502020204030204" pitchFamily="34" charset="0"/>
               </a:rPr>
-              <a:t>An example of text that can elaborate on the results followed by an example plot presenting the project results. You may also include graphs, plots, images, tables etc..</a:t>
-            </a:r>
-          </a:p>
-          <a:p>
-            <a:pPr lvl="0" algn="just" defTabSz="2519995">
+              <a:t> Then</a:t>
+            </a:r>
+            <a:r>
+              <a:rPr lang="en-US" sz="3400" b="1" dirty="0">
+                <a:latin typeface="Calibri" panose="020F0502020204030204" pitchFamily="34" charset="0"/>
+                <a:ea typeface="Calibri" panose="020F0502020204030204" pitchFamily="34" charset="0"/>
+                <a:cs typeface="Calibri" panose="020F0502020204030204" pitchFamily="34" charset="0"/>
+              </a:rPr>
+              <a:t> </a:t>
+            </a:r>
+            <a:r>
+              <a:rPr lang="en-US" sz="3400" dirty="0">
+                <a:latin typeface="Calibri" panose="020F0502020204030204" pitchFamily="34" charset="0"/>
+                <a:ea typeface="Calibri" panose="020F0502020204030204" pitchFamily="34" charset="0"/>
+                <a:cs typeface="Calibri" panose="020F0502020204030204" pitchFamily="34" charset="0"/>
+              </a:rPr>
+              <a:t>we apply STFT transformation : [Yogev Enter STFT Equation]</a:t>
+            </a:r>
+          </a:p>
+          <a:p>
+            <a:pPr lvl="0" defTabSz="2519995">
               <a:defRPr/>
             </a:pPr>
             <a:endParaRPr lang="en-US" sz="3400" dirty="0">
@@ -4619,6 +4992,78 @@
               <a:ea typeface="Calibri" panose="020F0502020204030204" pitchFamily="34" charset="0"/>
               <a:cs typeface="Calibri" panose="020F0502020204030204" pitchFamily="34" charset="0"/>
             </a:endParaRPr>
+          </a:p>
+          <a:p>
+            <a:pPr lvl="0" defTabSz="2519995">
+              <a:defRPr/>
+            </a:pPr>
+            <a:r>
+              <a:rPr lang="en-US" sz="3400" dirty="0">
+                <a:latin typeface="Calibri" panose="020F0502020204030204" pitchFamily="34" charset="0"/>
+                <a:ea typeface="Calibri" panose="020F0502020204030204" pitchFamily="34" charset="0"/>
+                <a:cs typeface="Calibri" panose="020F0502020204030204" pitchFamily="34" charset="0"/>
+              </a:rPr>
+              <a:t>And use median filters to separate the harmonic and percussive content.</a:t>
+            </a:r>
+            <a:endParaRPr lang="en-US" sz="3400" b="1" dirty="0">
+              <a:latin typeface="Calibri" panose="020F0502020204030204" pitchFamily="34" charset="0"/>
+              <a:ea typeface="Calibri" panose="020F0502020204030204" pitchFamily="34" charset="0"/>
+              <a:cs typeface="Calibri" panose="020F0502020204030204" pitchFamily="34" charset="0"/>
+            </a:endParaRPr>
+          </a:p>
+          <a:p>
+            <a:pPr lvl="0" algn="ctr" defTabSz="2519995">
+              <a:defRPr/>
+            </a:pPr>
+            <a:endParaRPr lang="en-US" sz="5654" b="1" dirty="0">
+              <a:latin typeface="Georgia" panose="02040502050405020303" pitchFamily="18" charset="0"/>
+            </a:endParaRPr>
+          </a:p>
+          <a:p>
+            <a:pPr lvl="0" defTabSz="2519995">
+              <a:defRPr/>
+            </a:pPr>
+            <a:endParaRPr lang="en-US" sz="3400" b="1" dirty="0">
+              <a:latin typeface="Calibri" panose="020F0502020204030204" pitchFamily="34" charset="0"/>
+              <a:ea typeface="Calibri" panose="020F0502020204030204" pitchFamily="34" charset="0"/>
+              <a:cs typeface="Calibri" panose="020F0502020204030204" pitchFamily="34" charset="0"/>
+            </a:endParaRPr>
+          </a:p>
+          <a:p>
+            <a:pPr lvl="0" defTabSz="2519995">
+              <a:defRPr/>
+            </a:pPr>
+            <a:r>
+              <a:rPr lang="en-US" sz="3400" dirty="0">
+                <a:latin typeface="Calibri" panose="020F0502020204030204" pitchFamily="34" charset="0"/>
+                <a:ea typeface="Calibri" panose="020F0502020204030204" pitchFamily="34" charset="0"/>
+                <a:cs typeface="Calibri" panose="020F0502020204030204" pitchFamily="34" charset="0"/>
+              </a:rPr>
+              <a:t>WSOLA:</a:t>
+            </a:r>
+          </a:p>
+          <a:p>
+            <a:pPr lvl="0" defTabSz="2519995">
+              <a:defRPr/>
+            </a:pPr>
+            <a:endParaRPr lang="en-US" sz="3400" dirty="0">
+              <a:latin typeface="Calibri" panose="020F0502020204030204" pitchFamily="34" charset="0"/>
+              <a:ea typeface="Calibri" panose="020F0502020204030204" pitchFamily="34" charset="0"/>
+              <a:cs typeface="Calibri" panose="020F0502020204030204" pitchFamily="34" charset="0"/>
+            </a:endParaRPr>
+          </a:p>
+          <a:p>
+            <a:pPr lvl="0" defTabSz="2519995">
+              <a:defRPr/>
+            </a:pPr>
+            <a:r>
+              <a:rPr lang="en-US" sz="3400" dirty="0">
+                <a:latin typeface="Calibri" panose="020F0502020204030204" pitchFamily="34" charset="0"/>
+                <a:ea typeface="Calibri" panose="020F0502020204030204" pitchFamily="34" charset="0"/>
+                <a:cs typeface="Calibri" panose="020F0502020204030204" pitchFamily="34" charset="0"/>
+              </a:rPr>
+              <a:t>Phase vocoder (PV-TSM): </a:t>
+            </a:r>
           </a:p>
           <a:p>
             <a:pPr lvl="0" algn="just" defTabSz="2519995">
@@ -4754,1524 +5199,6 @@
           </a:p>
         </p:txBody>
       </p:sp>
-      <p:grpSp>
-        <p:nvGrpSpPr>
-          <p:cNvPr id="2" name="Group 1">
-            <a:extLst>
-              <a:ext uri="{FF2B5EF4-FFF2-40B4-BE49-F238E27FC236}">
-                <a16:creationId xmlns:a16="http://schemas.microsoft.com/office/drawing/2014/main" id="{60E47AE2-524E-7C54-74C4-06234B8937AE}"/>
-              </a:ext>
-            </a:extLst>
-          </p:cNvPr>
-          <p:cNvGrpSpPr/>
-          <p:nvPr/>
-        </p:nvGrpSpPr>
-        <p:grpSpPr>
-          <a:xfrm>
-            <a:off x="13628576" y="9438302"/>
-            <a:ext cx="7408616" cy="5039803"/>
-            <a:chOff x="1921269" y="11735141"/>
-            <a:chExt cx="7408616" cy="5039803"/>
-          </a:xfrm>
-        </p:grpSpPr>
-        <p:grpSp>
-          <p:nvGrpSpPr>
-            <p:cNvPr id="3" name="Group 2">
-              <a:extLst>
-                <a:ext uri="{FF2B5EF4-FFF2-40B4-BE49-F238E27FC236}">
-                  <a16:creationId xmlns:a16="http://schemas.microsoft.com/office/drawing/2014/main" id="{76DA3214-42FB-82A4-EEA5-B8A71F60FA77}"/>
-                </a:ext>
-              </a:extLst>
-            </p:cNvPr>
-            <p:cNvGrpSpPr/>
-            <p:nvPr/>
-          </p:nvGrpSpPr>
-          <p:grpSpPr>
-            <a:xfrm>
-              <a:off x="1921269" y="11735141"/>
-              <a:ext cx="7408616" cy="5039803"/>
-              <a:chOff x="1219862" y="256213"/>
-              <a:chExt cx="7425678" cy="2853953"/>
-            </a:xfrm>
-          </p:grpSpPr>
-          <p:sp>
-            <p:nvSpPr>
-              <p:cNvPr id="21" name="TextBox 21">
-                <a:extLst>
-                  <a:ext uri="{FF2B5EF4-FFF2-40B4-BE49-F238E27FC236}">
-                    <a16:creationId xmlns:a16="http://schemas.microsoft.com/office/drawing/2014/main" id="{3CFCEF28-CD63-6D87-D0B4-9DD7FF628065}"/>
-                  </a:ext>
-                </a:extLst>
-              </p:cNvPr>
-              <p:cNvSpPr txBox="1"/>
-              <p:nvPr/>
-            </p:nvSpPr>
-            <p:spPr>
-              <a:xfrm>
-                <a:off x="7881438" y="1439589"/>
-                <a:ext cx="764102" cy="642519"/>
-              </a:xfrm>
-              <a:prstGeom prst="rect">
-                <a:avLst/>
-              </a:prstGeom>
-              <a:noFill/>
-              <a:ln w="9525" cmpd="sng">
-                <a:noFill/>
-              </a:ln>
-            </p:spPr>
-            <p:style>
-              <a:lnRef idx="0">
-                <a:scrgbClr r="0" g="0" b="0"/>
-              </a:lnRef>
-              <a:fillRef idx="0">
-                <a:scrgbClr r="0" g="0" b="0"/>
-              </a:fillRef>
-              <a:effectRef idx="0">
-                <a:scrgbClr r="0" g="0" b="0"/>
-              </a:effectRef>
-              <a:fontRef idx="minor">
-                <a:schemeClr val="dk1"/>
-              </a:fontRef>
-            </p:style>
-            <p:txBody>
-              <a:bodyPr wrap="none" rtlCol="0" anchor="t">
-                <a:normAutofit/>
-              </a:bodyPr>
-              <a:lstStyle>
-                <a:lvl1pPr marL="0" indent="0">
-                  <a:defRPr sz="1100">
-                    <a:solidFill>
-                      <a:schemeClr val="dk1"/>
-                    </a:solidFill>
-                    <a:latin typeface="+mn-lt"/>
-                    <a:ea typeface="+mn-ea"/>
-                    <a:cs typeface="+mn-cs"/>
-                  </a:defRPr>
-                </a:lvl1pPr>
-                <a:lvl2pPr marL="457200" indent="0">
-                  <a:defRPr sz="1100">
-                    <a:solidFill>
-                      <a:schemeClr val="dk1"/>
-                    </a:solidFill>
-                    <a:latin typeface="+mn-lt"/>
-                    <a:ea typeface="+mn-ea"/>
-                    <a:cs typeface="+mn-cs"/>
-                  </a:defRPr>
-                </a:lvl2pPr>
-                <a:lvl3pPr marL="914400" indent="0">
-                  <a:defRPr sz="1100">
-                    <a:solidFill>
-                      <a:schemeClr val="dk1"/>
-                    </a:solidFill>
-                    <a:latin typeface="+mn-lt"/>
-                    <a:ea typeface="+mn-ea"/>
-                    <a:cs typeface="+mn-cs"/>
-                  </a:defRPr>
-                </a:lvl3pPr>
-                <a:lvl4pPr marL="1371600" indent="0">
-                  <a:defRPr sz="1100">
-                    <a:solidFill>
-                      <a:schemeClr val="dk1"/>
-                    </a:solidFill>
-                    <a:latin typeface="+mn-lt"/>
-                    <a:ea typeface="+mn-ea"/>
-                    <a:cs typeface="+mn-cs"/>
-                  </a:defRPr>
-                </a:lvl4pPr>
-                <a:lvl5pPr marL="1828800" indent="0">
-                  <a:defRPr sz="1100">
-                    <a:solidFill>
-                      <a:schemeClr val="dk1"/>
-                    </a:solidFill>
-                    <a:latin typeface="+mn-lt"/>
-                    <a:ea typeface="+mn-ea"/>
-                    <a:cs typeface="+mn-cs"/>
-                  </a:defRPr>
-                </a:lvl5pPr>
-                <a:lvl6pPr marL="2286000" indent="0">
-                  <a:defRPr sz="1100">
-                    <a:solidFill>
-                      <a:schemeClr val="dk1"/>
-                    </a:solidFill>
-                    <a:latin typeface="+mn-lt"/>
-                    <a:ea typeface="+mn-ea"/>
-                    <a:cs typeface="+mn-cs"/>
-                  </a:defRPr>
-                </a:lvl6pPr>
-                <a:lvl7pPr marL="2743200" indent="0">
-                  <a:defRPr sz="1100">
-                    <a:solidFill>
-                      <a:schemeClr val="dk1"/>
-                    </a:solidFill>
-                    <a:latin typeface="+mn-lt"/>
-                    <a:ea typeface="+mn-ea"/>
-                    <a:cs typeface="+mn-cs"/>
-                  </a:defRPr>
-                </a:lvl7pPr>
-                <a:lvl8pPr marL="3200400" indent="0">
-                  <a:defRPr sz="1100">
-                    <a:solidFill>
-                      <a:schemeClr val="dk1"/>
-                    </a:solidFill>
-                    <a:latin typeface="+mn-lt"/>
-                    <a:ea typeface="+mn-ea"/>
-                    <a:cs typeface="+mn-cs"/>
-                  </a:defRPr>
-                </a:lvl8pPr>
-                <a:lvl9pPr marL="3657600" indent="0">
-                  <a:defRPr sz="1100">
-                    <a:solidFill>
-                      <a:schemeClr val="dk1"/>
-                    </a:solidFill>
-                    <a:latin typeface="+mn-lt"/>
-                    <a:ea typeface="+mn-ea"/>
-                    <a:cs typeface="+mn-cs"/>
-                  </a:defRPr>
-                </a:lvl9pPr>
-              </a:lstStyle>
-              <a:p>
-                <a:pPr algn="ctr"/>
-                <a:r>
-                  <a:rPr lang="en-US" sz="2000" b="1" dirty="0">
-                    <a:solidFill>
-                      <a:schemeClr val="tx2"/>
-                    </a:solidFill>
-                    <a:latin typeface="Tahoma" pitchFamily="34" charset="0"/>
-                    <a:ea typeface="Tahoma" pitchFamily="34" charset="0"/>
-                    <a:cs typeface="Tahoma" pitchFamily="34" charset="0"/>
-                  </a:rPr>
-                  <a:t>GPS</a:t>
-                </a:r>
-              </a:p>
-            </p:txBody>
-          </p:sp>
-          <p:grpSp>
-            <p:nvGrpSpPr>
-              <p:cNvPr id="24" name="Group 23">
-                <a:extLst>
-                  <a:ext uri="{FF2B5EF4-FFF2-40B4-BE49-F238E27FC236}">
-                    <a16:creationId xmlns:a16="http://schemas.microsoft.com/office/drawing/2014/main" id="{129F74FA-2806-ABFE-FEBE-1F3A9F5DA95C}"/>
-                  </a:ext>
-                </a:extLst>
-              </p:cNvPr>
-              <p:cNvGrpSpPr/>
-              <p:nvPr/>
-            </p:nvGrpSpPr>
-            <p:grpSpPr>
-              <a:xfrm>
-                <a:off x="1219862" y="256213"/>
-                <a:ext cx="6903312" cy="2853953"/>
-                <a:chOff x="1219862" y="256213"/>
-                <a:chExt cx="6903312" cy="2853953"/>
-              </a:xfrm>
-            </p:grpSpPr>
-            <p:grpSp>
-              <p:nvGrpSpPr>
-                <p:cNvPr id="26" name="Group 25">
-                  <a:extLst>
-                    <a:ext uri="{FF2B5EF4-FFF2-40B4-BE49-F238E27FC236}">
-                      <a16:creationId xmlns:a16="http://schemas.microsoft.com/office/drawing/2014/main" id="{EEA818D3-8288-6C86-A098-F61F156C1CED}"/>
-                    </a:ext>
-                  </a:extLst>
-                </p:cNvPr>
-                <p:cNvGrpSpPr/>
-                <p:nvPr/>
-              </p:nvGrpSpPr>
-              <p:grpSpPr>
-                <a:xfrm>
-                  <a:off x="1219862" y="256213"/>
-                  <a:ext cx="6903312" cy="2282201"/>
-                  <a:chOff x="1219862" y="256213"/>
-                  <a:chExt cx="6903312" cy="2282201"/>
-                </a:xfrm>
-              </p:grpSpPr>
-              <p:sp>
-                <p:nvSpPr>
-                  <p:cNvPr id="29" name="Rounded Rectangle 22">
-                    <a:extLst>
-                      <a:ext uri="{FF2B5EF4-FFF2-40B4-BE49-F238E27FC236}">
-                        <a16:creationId xmlns:a16="http://schemas.microsoft.com/office/drawing/2014/main" id="{447A8F72-734F-7603-CC7F-6DD0BE1A8420}"/>
-                      </a:ext>
-                    </a:extLst>
-                  </p:cNvPr>
-                  <p:cNvSpPr/>
-                  <p:nvPr/>
-                </p:nvSpPr>
-                <p:spPr>
-                  <a:xfrm>
-                    <a:off x="1219862" y="1524659"/>
-                    <a:ext cx="1857375" cy="543519"/>
-                  </a:xfrm>
-                  <a:prstGeom prst="roundRect">
-                    <a:avLst/>
-                  </a:prstGeom>
-                  <a:noFill/>
-                  <a:ln w="12700">
-                    <a:solidFill>
-                      <a:sysClr val="windowText" lastClr="000000"/>
-                    </a:solidFill>
-                  </a:ln>
-                  <a:effectLst>
-                    <a:outerShdw blurRad="63500" sx="102000" sy="102000" algn="ctr" rotWithShape="0">
-                      <a:prstClr val="black">
-                        <a:alpha val="40000"/>
-                      </a:prstClr>
-                    </a:outerShdw>
-                  </a:effectLst>
-                </p:spPr>
-                <p:style>
-                  <a:lnRef idx="2">
-                    <a:schemeClr val="accent1">
-                      <a:shade val="50000"/>
-                    </a:schemeClr>
-                  </a:lnRef>
-                  <a:fillRef idx="1">
-                    <a:schemeClr val="accent1"/>
-                  </a:fillRef>
-                  <a:effectRef idx="0">
-                    <a:schemeClr val="accent1"/>
-                  </a:effectRef>
-                  <a:fontRef idx="minor">
-                    <a:schemeClr val="lt1"/>
-                  </a:fontRef>
-                </p:style>
-                <p:txBody>
-                  <a:bodyPr rot="0" spcFirstLastPara="0" vert="horz" wrap="none" lIns="91440" tIns="45720" rIns="91440" bIns="45720" numCol="1" spcCol="0" rtlCol="0" fromWordArt="0" anchor="ctr" anchorCtr="0" forceAA="0" compatLnSpc="1">
-                    <a:prstTxWarp prst="textNoShape">
-                      <a:avLst/>
-                    </a:prstTxWarp>
-                    <a:normAutofit/>
-                  </a:bodyPr>
-                  <a:lstStyle>
-                    <a:lvl1pPr marL="0" indent="0">
-                      <a:defRPr sz="1100">
-                        <a:solidFill>
-                          <a:schemeClr val="lt1"/>
-                        </a:solidFill>
-                        <a:latin typeface="+mn-lt"/>
-                        <a:ea typeface="+mn-ea"/>
-                        <a:cs typeface="+mn-cs"/>
-                      </a:defRPr>
-                    </a:lvl1pPr>
-                    <a:lvl2pPr marL="457200" indent="0">
-                      <a:defRPr sz="1100">
-                        <a:solidFill>
-                          <a:schemeClr val="lt1"/>
-                        </a:solidFill>
-                        <a:latin typeface="+mn-lt"/>
-                        <a:ea typeface="+mn-ea"/>
-                        <a:cs typeface="+mn-cs"/>
-                      </a:defRPr>
-                    </a:lvl2pPr>
-                    <a:lvl3pPr marL="914400" indent="0">
-                      <a:defRPr sz="1100">
-                        <a:solidFill>
-                          <a:schemeClr val="lt1"/>
-                        </a:solidFill>
-                        <a:latin typeface="+mn-lt"/>
-                        <a:ea typeface="+mn-ea"/>
-                        <a:cs typeface="+mn-cs"/>
-                      </a:defRPr>
-                    </a:lvl3pPr>
-                    <a:lvl4pPr marL="1371600" indent="0">
-                      <a:defRPr sz="1100">
-                        <a:solidFill>
-                          <a:schemeClr val="lt1"/>
-                        </a:solidFill>
-                        <a:latin typeface="+mn-lt"/>
-                        <a:ea typeface="+mn-ea"/>
-                        <a:cs typeface="+mn-cs"/>
-                      </a:defRPr>
-                    </a:lvl4pPr>
-                    <a:lvl5pPr marL="1828800" indent="0">
-                      <a:defRPr sz="1100">
-                        <a:solidFill>
-                          <a:schemeClr val="lt1"/>
-                        </a:solidFill>
-                        <a:latin typeface="+mn-lt"/>
-                        <a:ea typeface="+mn-ea"/>
-                        <a:cs typeface="+mn-cs"/>
-                      </a:defRPr>
-                    </a:lvl5pPr>
-                    <a:lvl6pPr marL="2286000" indent="0">
-                      <a:defRPr sz="1100">
-                        <a:solidFill>
-                          <a:schemeClr val="lt1"/>
-                        </a:solidFill>
-                        <a:latin typeface="+mn-lt"/>
-                        <a:ea typeface="+mn-ea"/>
-                        <a:cs typeface="+mn-cs"/>
-                      </a:defRPr>
-                    </a:lvl6pPr>
-                    <a:lvl7pPr marL="2743200" indent="0">
-                      <a:defRPr sz="1100">
-                        <a:solidFill>
-                          <a:schemeClr val="lt1"/>
-                        </a:solidFill>
-                        <a:latin typeface="+mn-lt"/>
-                        <a:ea typeface="+mn-ea"/>
-                        <a:cs typeface="+mn-cs"/>
-                      </a:defRPr>
-                    </a:lvl7pPr>
-                    <a:lvl8pPr marL="3200400" indent="0">
-                      <a:defRPr sz="1100">
-                        <a:solidFill>
-                          <a:schemeClr val="lt1"/>
-                        </a:solidFill>
-                        <a:latin typeface="+mn-lt"/>
-                        <a:ea typeface="+mn-ea"/>
-                        <a:cs typeface="+mn-cs"/>
-                      </a:defRPr>
-                    </a:lvl8pPr>
-                    <a:lvl9pPr marL="3657600" indent="0">
-                      <a:defRPr sz="1100">
-                        <a:solidFill>
-                          <a:schemeClr val="lt1"/>
-                        </a:solidFill>
-                        <a:latin typeface="+mn-lt"/>
-                        <a:ea typeface="+mn-ea"/>
-                        <a:cs typeface="+mn-cs"/>
-                      </a:defRPr>
-                    </a:lvl9pPr>
-                  </a:lstStyle>
-                  <a:p>
-                    <a:pPr algn="ctr">
-                      <a:spcAft>
-                        <a:spcPts val="0"/>
-                      </a:spcAft>
-                    </a:pPr>
-                    <a:r>
-                      <a:rPr lang="en-US" sz="2000" b="1" dirty="0">
-                        <a:solidFill>
-                          <a:schemeClr val="tx2"/>
-                        </a:solidFill>
-                        <a:effectLst/>
-                        <a:latin typeface="Tahoma" pitchFamily="34" charset="0"/>
-                        <a:ea typeface="Tahoma" pitchFamily="34" charset="0"/>
-                        <a:cs typeface="Tahoma" pitchFamily="34" charset="0"/>
-                      </a:rPr>
-                      <a:t>IMU</a:t>
-                    </a:r>
-                  </a:p>
-                </p:txBody>
-              </p:sp>
-              <p:sp>
-                <p:nvSpPr>
-                  <p:cNvPr id="30" name="Rounded Rectangle 24">
-                    <a:extLst>
-                      <a:ext uri="{FF2B5EF4-FFF2-40B4-BE49-F238E27FC236}">
-                        <a16:creationId xmlns:a16="http://schemas.microsoft.com/office/drawing/2014/main" id="{24645860-9791-9DC7-249A-00C1F70A2ED3}"/>
-                      </a:ext>
-                    </a:extLst>
-                  </p:cNvPr>
-                  <p:cNvSpPr/>
-                  <p:nvPr/>
-                </p:nvSpPr>
-                <p:spPr>
-                  <a:xfrm>
-                    <a:off x="5867400" y="1355050"/>
-                    <a:ext cx="1061539" cy="516614"/>
-                  </a:xfrm>
-                  <a:prstGeom prst="roundRect">
-                    <a:avLst/>
-                  </a:prstGeom>
-                  <a:noFill/>
-                  <a:ln w="12700">
-                    <a:solidFill>
-                      <a:sysClr val="windowText" lastClr="000000"/>
-                    </a:solidFill>
-                  </a:ln>
-                  <a:effectLst>
-                    <a:outerShdw blurRad="63500" sx="102000" sy="102000" algn="ctr" rotWithShape="0">
-                      <a:prstClr val="black">
-                        <a:alpha val="40000"/>
-                      </a:prstClr>
-                    </a:outerShdw>
-                  </a:effectLst>
-                </p:spPr>
-                <p:style>
-                  <a:lnRef idx="2">
-                    <a:schemeClr val="accent1">
-                      <a:shade val="50000"/>
-                    </a:schemeClr>
-                  </a:lnRef>
-                  <a:fillRef idx="1">
-                    <a:schemeClr val="accent1"/>
-                  </a:fillRef>
-                  <a:effectRef idx="0">
-                    <a:schemeClr val="accent1"/>
-                  </a:effectRef>
-                  <a:fontRef idx="minor">
-                    <a:schemeClr val="lt1"/>
-                  </a:fontRef>
-                </p:style>
-                <p:txBody>
-                  <a:bodyPr rot="0" spcFirstLastPara="0" vert="horz" wrap="none" lIns="91440" tIns="45720" rIns="91440" bIns="45720" numCol="1" spcCol="0" rtlCol="0" fromWordArt="0" anchor="ctr" anchorCtr="0" forceAA="0" compatLnSpc="1">
-                    <a:prstTxWarp prst="textNoShape">
-                      <a:avLst/>
-                    </a:prstTxWarp>
-                    <a:normAutofit/>
-                  </a:bodyPr>
-                  <a:lstStyle>
-                    <a:lvl1pPr marL="0" indent="0">
-                      <a:defRPr sz="1100">
-                        <a:solidFill>
-                          <a:schemeClr val="lt1"/>
-                        </a:solidFill>
-                        <a:latin typeface="+mn-lt"/>
-                        <a:ea typeface="+mn-ea"/>
-                        <a:cs typeface="+mn-cs"/>
-                      </a:defRPr>
-                    </a:lvl1pPr>
-                    <a:lvl2pPr marL="457200" indent="0">
-                      <a:defRPr sz="1100">
-                        <a:solidFill>
-                          <a:schemeClr val="lt1"/>
-                        </a:solidFill>
-                        <a:latin typeface="+mn-lt"/>
-                        <a:ea typeface="+mn-ea"/>
-                        <a:cs typeface="+mn-cs"/>
-                      </a:defRPr>
-                    </a:lvl2pPr>
-                    <a:lvl3pPr marL="914400" indent="0">
-                      <a:defRPr sz="1100">
-                        <a:solidFill>
-                          <a:schemeClr val="lt1"/>
-                        </a:solidFill>
-                        <a:latin typeface="+mn-lt"/>
-                        <a:ea typeface="+mn-ea"/>
-                        <a:cs typeface="+mn-cs"/>
-                      </a:defRPr>
-                    </a:lvl3pPr>
-                    <a:lvl4pPr marL="1371600" indent="0">
-                      <a:defRPr sz="1100">
-                        <a:solidFill>
-                          <a:schemeClr val="lt1"/>
-                        </a:solidFill>
-                        <a:latin typeface="+mn-lt"/>
-                        <a:ea typeface="+mn-ea"/>
-                        <a:cs typeface="+mn-cs"/>
-                      </a:defRPr>
-                    </a:lvl4pPr>
-                    <a:lvl5pPr marL="1828800" indent="0">
-                      <a:defRPr sz="1100">
-                        <a:solidFill>
-                          <a:schemeClr val="lt1"/>
-                        </a:solidFill>
-                        <a:latin typeface="+mn-lt"/>
-                        <a:ea typeface="+mn-ea"/>
-                        <a:cs typeface="+mn-cs"/>
-                      </a:defRPr>
-                    </a:lvl5pPr>
-                    <a:lvl6pPr marL="2286000" indent="0">
-                      <a:defRPr sz="1100">
-                        <a:solidFill>
-                          <a:schemeClr val="lt1"/>
-                        </a:solidFill>
-                        <a:latin typeface="+mn-lt"/>
-                        <a:ea typeface="+mn-ea"/>
-                        <a:cs typeface="+mn-cs"/>
-                      </a:defRPr>
-                    </a:lvl6pPr>
-                    <a:lvl7pPr marL="2743200" indent="0">
-                      <a:defRPr sz="1100">
-                        <a:solidFill>
-                          <a:schemeClr val="lt1"/>
-                        </a:solidFill>
-                        <a:latin typeface="+mn-lt"/>
-                        <a:ea typeface="+mn-ea"/>
-                        <a:cs typeface="+mn-cs"/>
-                      </a:defRPr>
-                    </a:lvl7pPr>
-                    <a:lvl8pPr marL="3200400" indent="0">
-                      <a:defRPr sz="1100">
-                        <a:solidFill>
-                          <a:schemeClr val="lt1"/>
-                        </a:solidFill>
-                        <a:latin typeface="+mn-lt"/>
-                        <a:ea typeface="+mn-ea"/>
-                        <a:cs typeface="+mn-cs"/>
-                      </a:defRPr>
-                    </a:lvl8pPr>
-                    <a:lvl9pPr marL="3657600" indent="0">
-                      <a:defRPr sz="1100">
-                        <a:solidFill>
-                          <a:schemeClr val="lt1"/>
-                        </a:solidFill>
-                        <a:latin typeface="+mn-lt"/>
-                        <a:ea typeface="+mn-ea"/>
-                        <a:cs typeface="+mn-cs"/>
-                      </a:defRPr>
-                    </a:lvl9pPr>
-                  </a:lstStyle>
-                  <a:p>
-                    <a:pPr algn="ctr">
-                      <a:spcAft>
-                        <a:spcPts val="0"/>
-                      </a:spcAft>
-                    </a:pPr>
-                    <a:r>
-                      <a:rPr lang="en-US" sz="2000" b="1" dirty="0" err="1">
-                        <a:solidFill>
-                          <a:schemeClr val="tx2"/>
-                        </a:solidFill>
-                        <a:effectLst/>
-                        <a:latin typeface="Tahoma" pitchFamily="34" charset="0"/>
-                        <a:ea typeface="Tahoma" pitchFamily="34" charset="0"/>
-                        <a:cs typeface="Tahoma" pitchFamily="34" charset="0"/>
-                      </a:rPr>
-                      <a:t>Kalman</a:t>
-                    </a:r>
-                    <a:endParaRPr lang="en-US" sz="2000" b="1" dirty="0">
-                      <a:solidFill>
-                        <a:schemeClr val="tx2"/>
-                      </a:solidFill>
-                      <a:effectLst/>
-                      <a:latin typeface="Tahoma" pitchFamily="34" charset="0"/>
-                      <a:ea typeface="Tahoma" pitchFamily="34" charset="0"/>
-                      <a:cs typeface="Tahoma" pitchFamily="34" charset="0"/>
-                    </a:endParaRPr>
-                  </a:p>
-                  <a:p>
-                    <a:pPr algn="ctr">
-                      <a:spcAft>
-                        <a:spcPts val="0"/>
-                      </a:spcAft>
-                    </a:pPr>
-                    <a:r>
-                      <a:rPr lang="en-US" sz="2000" b="1" dirty="0">
-                        <a:solidFill>
-                          <a:schemeClr val="tx2"/>
-                        </a:solidFill>
-                        <a:latin typeface="Tahoma" pitchFamily="34" charset="0"/>
-                        <a:ea typeface="Tahoma" pitchFamily="34" charset="0"/>
-                        <a:cs typeface="Tahoma" pitchFamily="34" charset="0"/>
-                      </a:rPr>
-                      <a:t>Filter</a:t>
-                    </a:r>
-                    <a:endParaRPr lang="en-US" sz="2000" b="1" dirty="0">
-                      <a:solidFill>
-                        <a:schemeClr val="tx2"/>
-                      </a:solidFill>
-                      <a:effectLst/>
-                      <a:latin typeface="Tahoma" pitchFamily="34" charset="0"/>
-                      <a:ea typeface="Tahoma" pitchFamily="34" charset="0"/>
-                      <a:cs typeface="Tahoma" pitchFamily="34" charset="0"/>
-                    </a:endParaRPr>
-                  </a:p>
-                </p:txBody>
-              </p:sp>
-              <p:sp>
-                <p:nvSpPr>
-                  <p:cNvPr id="32" name="Rounded Rectangle 25">
-                    <a:extLst>
-                      <a:ext uri="{FF2B5EF4-FFF2-40B4-BE49-F238E27FC236}">
-                        <a16:creationId xmlns:a16="http://schemas.microsoft.com/office/drawing/2014/main" id="{7B02F705-5F68-9634-41F4-3CBAA13EA6A1}"/>
-                      </a:ext>
-                    </a:extLst>
-                  </p:cNvPr>
-                  <p:cNvSpPr/>
-                  <p:nvPr/>
-                </p:nvSpPr>
-                <p:spPr>
-                  <a:xfrm>
-                    <a:off x="3820188" y="1184791"/>
-                    <a:ext cx="1465817" cy="783193"/>
-                  </a:xfrm>
-                  <a:prstGeom prst="roundRect">
-                    <a:avLst/>
-                  </a:prstGeom>
-                  <a:noFill/>
-                  <a:ln w="12700">
-                    <a:solidFill>
-                      <a:sysClr val="windowText" lastClr="000000"/>
-                    </a:solidFill>
-                  </a:ln>
-                  <a:effectLst>
-                    <a:outerShdw blurRad="63500" sx="102000" sy="102000" algn="ctr" rotWithShape="0">
-                      <a:prstClr val="black">
-                        <a:alpha val="40000"/>
-                      </a:prstClr>
-                    </a:outerShdw>
-                  </a:effectLst>
-                </p:spPr>
-                <p:style>
-                  <a:lnRef idx="2">
-                    <a:schemeClr val="accent1">
-                      <a:shade val="50000"/>
-                    </a:schemeClr>
-                  </a:lnRef>
-                  <a:fillRef idx="1">
-                    <a:schemeClr val="accent1"/>
-                  </a:fillRef>
-                  <a:effectRef idx="0">
-                    <a:schemeClr val="accent1"/>
-                  </a:effectRef>
-                  <a:fontRef idx="minor">
-                    <a:schemeClr val="lt1"/>
-                  </a:fontRef>
-                </p:style>
-                <p:txBody>
-                  <a:bodyPr rot="0" spcFirstLastPara="0" vert="horz" wrap="none" lIns="91440" tIns="45720" rIns="91440" bIns="45720" numCol="1" spcCol="0" rtlCol="0" fromWordArt="0" anchor="ctr" anchorCtr="0" forceAA="0" compatLnSpc="1">
-                    <a:prstTxWarp prst="textNoShape">
-                      <a:avLst/>
-                    </a:prstTxWarp>
-                    <a:normAutofit/>
-                  </a:bodyPr>
-                  <a:lstStyle>
-                    <a:lvl1pPr marL="0" indent="0">
-                      <a:defRPr sz="1100">
-                        <a:solidFill>
-                          <a:schemeClr val="lt1"/>
-                        </a:solidFill>
-                        <a:latin typeface="+mn-lt"/>
-                        <a:ea typeface="+mn-ea"/>
-                        <a:cs typeface="+mn-cs"/>
-                      </a:defRPr>
-                    </a:lvl1pPr>
-                    <a:lvl2pPr marL="457200" indent="0">
-                      <a:defRPr sz="1100">
-                        <a:solidFill>
-                          <a:schemeClr val="lt1"/>
-                        </a:solidFill>
-                        <a:latin typeface="+mn-lt"/>
-                        <a:ea typeface="+mn-ea"/>
-                        <a:cs typeface="+mn-cs"/>
-                      </a:defRPr>
-                    </a:lvl2pPr>
-                    <a:lvl3pPr marL="914400" indent="0">
-                      <a:defRPr sz="1100">
-                        <a:solidFill>
-                          <a:schemeClr val="lt1"/>
-                        </a:solidFill>
-                        <a:latin typeface="+mn-lt"/>
-                        <a:ea typeface="+mn-ea"/>
-                        <a:cs typeface="+mn-cs"/>
-                      </a:defRPr>
-                    </a:lvl3pPr>
-                    <a:lvl4pPr marL="1371600" indent="0">
-                      <a:defRPr sz="1100">
-                        <a:solidFill>
-                          <a:schemeClr val="lt1"/>
-                        </a:solidFill>
-                        <a:latin typeface="+mn-lt"/>
-                        <a:ea typeface="+mn-ea"/>
-                        <a:cs typeface="+mn-cs"/>
-                      </a:defRPr>
-                    </a:lvl4pPr>
-                    <a:lvl5pPr marL="1828800" indent="0">
-                      <a:defRPr sz="1100">
-                        <a:solidFill>
-                          <a:schemeClr val="lt1"/>
-                        </a:solidFill>
-                        <a:latin typeface="+mn-lt"/>
-                        <a:ea typeface="+mn-ea"/>
-                        <a:cs typeface="+mn-cs"/>
-                      </a:defRPr>
-                    </a:lvl5pPr>
-                    <a:lvl6pPr marL="2286000" indent="0">
-                      <a:defRPr sz="1100">
-                        <a:solidFill>
-                          <a:schemeClr val="lt1"/>
-                        </a:solidFill>
-                        <a:latin typeface="+mn-lt"/>
-                        <a:ea typeface="+mn-ea"/>
-                        <a:cs typeface="+mn-cs"/>
-                      </a:defRPr>
-                    </a:lvl6pPr>
-                    <a:lvl7pPr marL="2743200" indent="0">
-                      <a:defRPr sz="1100">
-                        <a:solidFill>
-                          <a:schemeClr val="lt1"/>
-                        </a:solidFill>
-                        <a:latin typeface="+mn-lt"/>
-                        <a:ea typeface="+mn-ea"/>
-                        <a:cs typeface="+mn-cs"/>
-                      </a:defRPr>
-                    </a:lvl7pPr>
-                    <a:lvl8pPr marL="3200400" indent="0">
-                      <a:defRPr sz="1100">
-                        <a:solidFill>
-                          <a:schemeClr val="lt1"/>
-                        </a:solidFill>
-                        <a:latin typeface="+mn-lt"/>
-                        <a:ea typeface="+mn-ea"/>
-                        <a:cs typeface="+mn-cs"/>
-                      </a:defRPr>
-                    </a:lvl8pPr>
-                    <a:lvl9pPr marL="3657600" indent="0">
-                      <a:defRPr sz="1100">
-                        <a:solidFill>
-                          <a:schemeClr val="lt1"/>
-                        </a:solidFill>
-                        <a:latin typeface="+mn-lt"/>
-                        <a:ea typeface="+mn-ea"/>
-                        <a:cs typeface="+mn-cs"/>
-                      </a:defRPr>
-                    </a:lvl9pPr>
-                  </a:lstStyle>
-                  <a:p>
-                    <a:pPr algn="ctr">
-                      <a:spcAft>
-                        <a:spcPts val="0"/>
-                      </a:spcAft>
-                    </a:pPr>
-                    <a:r>
-                      <a:rPr lang="en-US" sz="2000" b="1" dirty="0" err="1">
-                        <a:solidFill>
-                          <a:schemeClr val="tx2"/>
-                        </a:solidFill>
-                        <a:effectLst/>
-                        <a:latin typeface="Tahoma" pitchFamily="34" charset="0"/>
-                        <a:ea typeface="Tahoma" pitchFamily="34" charset="0"/>
-                        <a:cs typeface="Tahoma" pitchFamily="34" charset="0"/>
-                      </a:rPr>
-                      <a:t>Strapdown</a:t>
-                    </a:r>
-                    <a:endParaRPr lang="en-US" sz="2000" b="1" dirty="0">
-                      <a:solidFill>
-                        <a:schemeClr val="tx2"/>
-                      </a:solidFill>
-                      <a:effectLst/>
-                      <a:latin typeface="Tahoma" pitchFamily="34" charset="0"/>
-                      <a:ea typeface="Tahoma" pitchFamily="34" charset="0"/>
-                      <a:cs typeface="Tahoma" pitchFamily="34" charset="0"/>
-                    </a:endParaRPr>
-                  </a:p>
-                  <a:p>
-                    <a:pPr algn="ctr">
-                      <a:spcAft>
-                        <a:spcPts val="0"/>
-                      </a:spcAft>
-                    </a:pPr>
-                    <a:r>
-                      <a:rPr lang="en-US" sz="2000" b="1" dirty="0">
-                        <a:solidFill>
-                          <a:schemeClr val="tx2"/>
-                        </a:solidFill>
-                        <a:latin typeface="Tahoma" pitchFamily="34" charset="0"/>
-                        <a:ea typeface="Tahoma" pitchFamily="34" charset="0"/>
-                        <a:cs typeface="Tahoma" pitchFamily="34" charset="0"/>
-                      </a:rPr>
-                      <a:t>Solution</a:t>
-                    </a:r>
-                    <a:endParaRPr lang="en-US" sz="2000" b="1" dirty="0">
-                      <a:solidFill>
-                        <a:schemeClr val="tx2"/>
-                      </a:solidFill>
-                      <a:effectLst/>
-                      <a:latin typeface="Tahoma" pitchFamily="34" charset="0"/>
-                      <a:ea typeface="Tahoma" pitchFamily="34" charset="0"/>
-                      <a:cs typeface="Tahoma" pitchFamily="34" charset="0"/>
-                    </a:endParaRPr>
-                  </a:p>
-                </p:txBody>
-              </p:sp>
-              <p:cxnSp>
-                <p:nvCxnSpPr>
-                  <p:cNvPr id="33" name="Straight Arrow Connector 32">
-                    <a:extLst>
-                      <a:ext uri="{FF2B5EF4-FFF2-40B4-BE49-F238E27FC236}">
-                        <a16:creationId xmlns:a16="http://schemas.microsoft.com/office/drawing/2014/main" id="{F66A8F27-E948-6FE6-C2DD-C7E3E6873EDA}"/>
-                      </a:ext>
-                    </a:extLst>
-                  </p:cNvPr>
-                  <p:cNvCxnSpPr/>
-                  <p:nvPr/>
-                </p:nvCxnSpPr>
-                <p:spPr>
-                  <a:xfrm flipV="1">
-                    <a:off x="3077237" y="1688450"/>
-                    <a:ext cx="742950" cy="1"/>
-                  </a:xfrm>
-                  <a:prstGeom prst="straightConnector1">
-                    <a:avLst/>
-                  </a:prstGeom>
-                  <a:ln w="57150">
-                    <a:solidFill>
-                      <a:schemeClr val="tx1"/>
-                    </a:solidFill>
-                    <a:tailEnd type="arrow"/>
-                  </a:ln>
-                </p:spPr>
-                <p:style>
-                  <a:lnRef idx="1">
-                    <a:schemeClr val="accent1"/>
-                  </a:lnRef>
-                  <a:fillRef idx="0">
-                    <a:schemeClr val="accent1"/>
-                  </a:fillRef>
-                  <a:effectRef idx="0">
-                    <a:schemeClr val="accent1"/>
-                  </a:effectRef>
-                  <a:fontRef idx="minor">
-                    <a:schemeClr val="tx1"/>
-                  </a:fontRef>
-                </p:style>
-              </p:cxnSp>
-              <p:cxnSp>
-                <p:nvCxnSpPr>
-                  <p:cNvPr id="34" name="Straight Arrow Connector 33">
-                    <a:extLst>
-                      <a:ext uri="{FF2B5EF4-FFF2-40B4-BE49-F238E27FC236}">
-                        <a16:creationId xmlns:a16="http://schemas.microsoft.com/office/drawing/2014/main" id="{1C8B23A7-E5E3-E73E-7C73-0ADA628B3B19}"/>
-                      </a:ext>
-                    </a:extLst>
-                  </p:cNvPr>
-                  <p:cNvCxnSpPr/>
-                  <p:nvPr/>
-                </p:nvCxnSpPr>
-                <p:spPr>
-                  <a:xfrm>
-                    <a:off x="5318844" y="1617908"/>
-                    <a:ext cx="600075" cy="1"/>
-                  </a:xfrm>
-                  <a:prstGeom prst="straightConnector1">
-                    <a:avLst/>
-                  </a:prstGeom>
-                  <a:ln w="57150">
-                    <a:solidFill>
-                      <a:schemeClr val="tx1"/>
-                    </a:solidFill>
-                    <a:tailEnd type="arrow"/>
-                  </a:ln>
-                </p:spPr>
-                <p:style>
-                  <a:lnRef idx="1">
-                    <a:schemeClr val="accent1"/>
-                  </a:lnRef>
-                  <a:fillRef idx="0">
-                    <a:schemeClr val="accent1"/>
-                  </a:fillRef>
-                  <a:effectRef idx="0">
-                    <a:schemeClr val="accent1"/>
-                  </a:effectRef>
-                  <a:fontRef idx="minor">
-                    <a:schemeClr val="tx1"/>
-                  </a:fontRef>
-                </p:style>
-              </p:cxnSp>
-              <p:cxnSp>
-                <p:nvCxnSpPr>
-                  <p:cNvPr id="35" name="Straight Arrow Connector 34">
-                    <a:extLst>
-                      <a:ext uri="{FF2B5EF4-FFF2-40B4-BE49-F238E27FC236}">
-                        <a16:creationId xmlns:a16="http://schemas.microsoft.com/office/drawing/2014/main" id="{C08DDC0F-1B04-5C88-F140-6D1928C8B9A9}"/>
-                      </a:ext>
-                    </a:extLst>
-                  </p:cNvPr>
-                  <p:cNvCxnSpPr/>
-                  <p:nvPr/>
-                </p:nvCxnSpPr>
-                <p:spPr>
-                  <a:xfrm flipH="1">
-                    <a:off x="6886574" y="1600200"/>
-                    <a:ext cx="962025" cy="0"/>
-                  </a:xfrm>
-                  <a:prstGeom prst="straightConnector1">
-                    <a:avLst/>
-                  </a:prstGeom>
-                  <a:ln w="57150">
-                    <a:solidFill>
-                      <a:schemeClr val="tx1"/>
-                    </a:solidFill>
-                    <a:tailEnd type="arrow"/>
-                  </a:ln>
-                </p:spPr>
-                <p:style>
-                  <a:lnRef idx="1">
-                    <a:schemeClr val="accent1"/>
-                  </a:lnRef>
-                  <a:fillRef idx="0">
-                    <a:schemeClr val="accent1"/>
-                  </a:fillRef>
-                  <a:effectRef idx="0">
-                    <a:schemeClr val="accent1"/>
-                  </a:effectRef>
-                  <a:fontRef idx="minor">
-                    <a:schemeClr val="tx1"/>
-                  </a:fontRef>
-                </p:style>
-              </p:cxnSp>
-              <p:cxnSp>
-                <p:nvCxnSpPr>
-                  <p:cNvPr id="36" name="Straight Arrow Connector 35">
-                    <a:extLst>
-                      <a:ext uri="{FF2B5EF4-FFF2-40B4-BE49-F238E27FC236}">
-                        <a16:creationId xmlns:a16="http://schemas.microsoft.com/office/drawing/2014/main" id="{FE04B1FB-7C63-7F2D-7A4E-018ED4495FF4}"/>
-                      </a:ext>
-                    </a:extLst>
-                  </p:cNvPr>
-                  <p:cNvCxnSpPr/>
-                  <p:nvPr/>
-                </p:nvCxnSpPr>
-                <p:spPr>
-                  <a:xfrm flipV="1">
-                    <a:off x="6398169" y="1001545"/>
-                    <a:ext cx="424866" cy="363651"/>
-                  </a:xfrm>
-                  <a:prstGeom prst="straightConnector1">
-                    <a:avLst/>
-                  </a:prstGeom>
-                  <a:ln w="57150">
-                    <a:solidFill>
-                      <a:schemeClr val="tx1"/>
-                    </a:solidFill>
-                    <a:tailEnd type="arrow"/>
-                  </a:ln>
-                </p:spPr>
-                <p:style>
-                  <a:lnRef idx="1">
-                    <a:schemeClr val="accent1"/>
-                  </a:lnRef>
-                  <a:fillRef idx="0">
-                    <a:schemeClr val="accent1"/>
-                  </a:fillRef>
-                  <a:effectRef idx="0">
-                    <a:schemeClr val="accent1"/>
-                  </a:effectRef>
-                  <a:fontRef idx="minor">
-                    <a:schemeClr val="tx1"/>
-                  </a:fontRef>
-                </p:style>
-              </p:cxnSp>
-              <p:sp>
-                <p:nvSpPr>
-                  <p:cNvPr id="37" name="Rounded Rectangle 32">
-                    <a:extLst>
-                      <a:ext uri="{FF2B5EF4-FFF2-40B4-BE49-F238E27FC236}">
-                        <a16:creationId xmlns:a16="http://schemas.microsoft.com/office/drawing/2014/main" id="{5974E322-F5C3-C7DC-67E3-3E3B9D2666BD}"/>
-                      </a:ext>
-                    </a:extLst>
-                  </p:cNvPr>
-                  <p:cNvSpPr/>
-                  <p:nvPr/>
-                </p:nvSpPr>
-                <p:spPr>
-                  <a:xfrm>
-                    <a:off x="6743699" y="256213"/>
-                    <a:ext cx="1379475" cy="735349"/>
-                  </a:xfrm>
-                  <a:prstGeom prst="roundRect">
-                    <a:avLst/>
-                  </a:prstGeom>
-                  <a:noFill/>
-                  <a:ln w="12700">
-                    <a:solidFill>
-                      <a:sysClr val="windowText" lastClr="000000"/>
-                    </a:solidFill>
-                  </a:ln>
-                  <a:effectLst>
-                    <a:outerShdw blurRad="63500" sx="102000" sy="102000" algn="ctr" rotWithShape="0">
-                      <a:prstClr val="black">
-                        <a:alpha val="40000"/>
-                      </a:prstClr>
-                    </a:outerShdw>
-                  </a:effectLst>
-                </p:spPr>
-                <p:style>
-                  <a:lnRef idx="2">
-                    <a:schemeClr val="accent1">
-                      <a:shade val="50000"/>
-                    </a:schemeClr>
-                  </a:lnRef>
-                  <a:fillRef idx="1">
-                    <a:schemeClr val="accent1"/>
-                  </a:fillRef>
-                  <a:effectRef idx="0">
-                    <a:schemeClr val="accent1"/>
-                  </a:effectRef>
-                  <a:fontRef idx="minor">
-                    <a:schemeClr val="lt1"/>
-                  </a:fontRef>
-                </p:style>
-                <p:txBody>
-                  <a:bodyPr rot="0" spcFirstLastPara="0" vert="horz" wrap="none" lIns="91440" tIns="45720" rIns="91440" bIns="45720" numCol="1" spcCol="0" rtlCol="0" fromWordArt="0" anchor="ctr" anchorCtr="0" forceAA="0" compatLnSpc="1">
-                    <a:prstTxWarp prst="textNoShape">
-                      <a:avLst/>
-                    </a:prstTxWarp>
-                    <a:normAutofit/>
-                  </a:bodyPr>
-                  <a:lstStyle>
-                    <a:lvl1pPr marL="0" indent="0">
-                      <a:defRPr sz="1100">
-                        <a:solidFill>
-                          <a:schemeClr val="lt1"/>
-                        </a:solidFill>
-                        <a:latin typeface="+mn-lt"/>
-                        <a:ea typeface="+mn-ea"/>
-                        <a:cs typeface="+mn-cs"/>
-                      </a:defRPr>
-                    </a:lvl1pPr>
-                    <a:lvl2pPr marL="457200" indent="0">
-                      <a:defRPr sz="1100">
-                        <a:solidFill>
-                          <a:schemeClr val="lt1"/>
-                        </a:solidFill>
-                        <a:latin typeface="+mn-lt"/>
-                        <a:ea typeface="+mn-ea"/>
-                        <a:cs typeface="+mn-cs"/>
-                      </a:defRPr>
-                    </a:lvl2pPr>
-                    <a:lvl3pPr marL="914400" indent="0">
-                      <a:defRPr sz="1100">
-                        <a:solidFill>
-                          <a:schemeClr val="lt1"/>
-                        </a:solidFill>
-                        <a:latin typeface="+mn-lt"/>
-                        <a:ea typeface="+mn-ea"/>
-                        <a:cs typeface="+mn-cs"/>
-                      </a:defRPr>
-                    </a:lvl3pPr>
-                    <a:lvl4pPr marL="1371600" indent="0">
-                      <a:defRPr sz="1100">
-                        <a:solidFill>
-                          <a:schemeClr val="lt1"/>
-                        </a:solidFill>
-                        <a:latin typeface="+mn-lt"/>
-                        <a:ea typeface="+mn-ea"/>
-                        <a:cs typeface="+mn-cs"/>
-                      </a:defRPr>
-                    </a:lvl4pPr>
-                    <a:lvl5pPr marL="1828800" indent="0">
-                      <a:defRPr sz="1100">
-                        <a:solidFill>
-                          <a:schemeClr val="lt1"/>
-                        </a:solidFill>
-                        <a:latin typeface="+mn-lt"/>
-                        <a:ea typeface="+mn-ea"/>
-                        <a:cs typeface="+mn-cs"/>
-                      </a:defRPr>
-                    </a:lvl5pPr>
-                    <a:lvl6pPr marL="2286000" indent="0">
-                      <a:defRPr sz="1100">
-                        <a:solidFill>
-                          <a:schemeClr val="lt1"/>
-                        </a:solidFill>
-                        <a:latin typeface="+mn-lt"/>
-                        <a:ea typeface="+mn-ea"/>
-                        <a:cs typeface="+mn-cs"/>
-                      </a:defRPr>
-                    </a:lvl6pPr>
-                    <a:lvl7pPr marL="2743200" indent="0">
-                      <a:defRPr sz="1100">
-                        <a:solidFill>
-                          <a:schemeClr val="lt1"/>
-                        </a:solidFill>
-                        <a:latin typeface="+mn-lt"/>
-                        <a:ea typeface="+mn-ea"/>
-                        <a:cs typeface="+mn-cs"/>
-                      </a:defRPr>
-                    </a:lvl7pPr>
-                    <a:lvl8pPr marL="3200400" indent="0">
-                      <a:defRPr sz="1100">
-                        <a:solidFill>
-                          <a:schemeClr val="lt1"/>
-                        </a:solidFill>
-                        <a:latin typeface="+mn-lt"/>
-                        <a:ea typeface="+mn-ea"/>
-                        <a:cs typeface="+mn-cs"/>
-                      </a:defRPr>
-                    </a:lvl8pPr>
-                    <a:lvl9pPr marL="3657600" indent="0">
-                      <a:defRPr sz="1100">
-                        <a:solidFill>
-                          <a:schemeClr val="lt1"/>
-                        </a:solidFill>
-                        <a:latin typeface="+mn-lt"/>
-                        <a:ea typeface="+mn-ea"/>
-                        <a:cs typeface="+mn-cs"/>
-                      </a:defRPr>
-                    </a:lvl9pPr>
-                  </a:lstStyle>
-                  <a:p>
-                    <a:pPr algn="ctr">
-                      <a:spcAft>
-                        <a:spcPts val="0"/>
-                      </a:spcAft>
-                    </a:pPr>
-                    <a:r>
-                      <a:rPr lang="en-US" sz="2000" b="1" dirty="0">
-                        <a:solidFill>
-                          <a:schemeClr val="tx2"/>
-                        </a:solidFill>
-                        <a:effectLst/>
-                        <a:latin typeface="Tahoma" pitchFamily="34" charset="0"/>
-                        <a:ea typeface="Tahoma" pitchFamily="34" charset="0"/>
-                        <a:cs typeface="Tahoma" pitchFamily="34" charset="0"/>
-                      </a:rPr>
-                      <a:t>Initial</a:t>
-                    </a:r>
-                  </a:p>
-                  <a:p>
-                    <a:pPr algn="ctr">
-                      <a:spcAft>
-                        <a:spcPts val="0"/>
-                      </a:spcAft>
-                    </a:pPr>
-                    <a:r>
-                      <a:rPr lang="en-US" sz="2000" b="1" dirty="0">
-                        <a:solidFill>
-                          <a:schemeClr val="tx2"/>
-                        </a:solidFill>
-                        <a:latin typeface="Tahoma" pitchFamily="34" charset="0"/>
-                        <a:ea typeface="Tahoma" pitchFamily="34" charset="0"/>
-                        <a:cs typeface="Tahoma" pitchFamily="34" charset="0"/>
-                      </a:rPr>
-                      <a:t>Conditions</a:t>
-                    </a:r>
-                    <a:endParaRPr lang="en-US" sz="2000" b="1" dirty="0">
-                      <a:solidFill>
-                        <a:schemeClr val="tx2"/>
-                      </a:solidFill>
-                      <a:effectLst/>
-                      <a:latin typeface="Tahoma" pitchFamily="34" charset="0"/>
-                      <a:ea typeface="Tahoma" pitchFamily="34" charset="0"/>
-                      <a:cs typeface="Tahoma" pitchFamily="34" charset="0"/>
-                    </a:endParaRPr>
-                  </a:p>
-                </p:txBody>
-              </p:sp>
-              <p:cxnSp>
-                <p:nvCxnSpPr>
-                  <p:cNvPr id="38" name="Straight Arrow Connector 37">
-                    <a:extLst>
-                      <a:ext uri="{FF2B5EF4-FFF2-40B4-BE49-F238E27FC236}">
-                        <a16:creationId xmlns:a16="http://schemas.microsoft.com/office/drawing/2014/main" id="{38A0225C-769D-5B4D-7591-C57E01E19192}"/>
-                      </a:ext>
-                    </a:extLst>
-                  </p:cNvPr>
-                  <p:cNvCxnSpPr/>
-                  <p:nvPr/>
-                </p:nvCxnSpPr>
-                <p:spPr>
-                  <a:xfrm rot="5400000">
-                    <a:off x="5981701" y="2200276"/>
-                    <a:ext cx="666750" cy="9525"/>
-                  </a:xfrm>
-                  <a:prstGeom prst="straightConnector1">
-                    <a:avLst/>
-                  </a:prstGeom>
-                  <a:ln w="57150">
-                    <a:solidFill>
-                      <a:schemeClr val="tx1"/>
-                    </a:solidFill>
-                    <a:tailEnd type="arrow"/>
-                  </a:ln>
-                </p:spPr>
-                <p:style>
-                  <a:lnRef idx="1">
-                    <a:schemeClr val="accent1"/>
-                  </a:lnRef>
-                  <a:fillRef idx="0">
-                    <a:schemeClr val="accent1"/>
-                  </a:fillRef>
-                  <a:effectRef idx="0">
-                    <a:schemeClr val="accent1"/>
-                  </a:effectRef>
-                  <a:fontRef idx="minor">
-                    <a:schemeClr val="tx1"/>
-                  </a:fontRef>
-                </p:style>
-              </p:cxnSp>
-            </p:grpSp>
-            <p:sp>
-              <p:nvSpPr>
-                <p:cNvPr id="27" name="TextBox 23">
-                  <a:extLst>
-                    <a:ext uri="{FF2B5EF4-FFF2-40B4-BE49-F238E27FC236}">
-                      <a16:creationId xmlns:a16="http://schemas.microsoft.com/office/drawing/2014/main" id="{D7A5C822-2ACC-B782-D693-4A846DEBB628}"/>
-                    </a:ext>
-                  </a:extLst>
-                </p:cNvPr>
-                <p:cNvSpPr txBox="1"/>
-                <p:nvPr/>
-              </p:nvSpPr>
-              <p:spPr>
-                <a:xfrm>
-                  <a:off x="5641937" y="2538414"/>
-                  <a:ext cx="1181099" cy="571752"/>
-                </a:xfrm>
-                <a:prstGeom prst="rect">
-                  <a:avLst/>
-                </a:prstGeom>
-                <a:noFill/>
-                <a:ln w="9525" cmpd="sng">
-                  <a:noFill/>
-                </a:ln>
-              </p:spPr>
-              <p:style>
-                <a:lnRef idx="0">
-                  <a:scrgbClr r="0" g="0" b="0"/>
-                </a:lnRef>
-                <a:fillRef idx="0">
-                  <a:scrgbClr r="0" g="0" b="0"/>
-                </a:fillRef>
-                <a:effectRef idx="0">
-                  <a:scrgbClr r="0" g="0" b="0"/>
-                </a:effectRef>
-                <a:fontRef idx="minor">
-                  <a:schemeClr val="dk1"/>
-                </a:fontRef>
-              </p:style>
-              <p:txBody>
-                <a:bodyPr wrap="none" rtlCol="0" anchor="t">
-                  <a:normAutofit/>
-                </a:bodyPr>
-                <a:lstStyle>
-                  <a:lvl1pPr marL="0" indent="0">
-                    <a:defRPr sz="1100">
-                      <a:solidFill>
-                        <a:schemeClr val="dk1"/>
-                      </a:solidFill>
-                      <a:latin typeface="+mn-lt"/>
-                      <a:ea typeface="+mn-ea"/>
-                      <a:cs typeface="+mn-cs"/>
-                    </a:defRPr>
-                  </a:lvl1pPr>
-                  <a:lvl2pPr marL="457200" indent="0">
-                    <a:defRPr sz="1100">
-                      <a:solidFill>
-                        <a:schemeClr val="dk1"/>
-                      </a:solidFill>
-                      <a:latin typeface="+mn-lt"/>
-                      <a:ea typeface="+mn-ea"/>
-                      <a:cs typeface="+mn-cs"/>
-                    </a:defRPr>
-                  </a:lvl2pPr>
-                  <a:lvl3pPr marL="914400" indent="0">
-                    <a:defRPr sz="1100">
-                      <a:solidFill>
-                        <a:schemeClr val="dk1"/>
-                      </a:solidFill>
-                      <a:latin typeface="+mn-lt"/>
-                      <a:ea typeface="+mn-ea"/>
-                      <a:cs typeface="+mn-cs"/>
-                    </a:defRPr>
-                  </a:lvl3pPr>
-                  <a:lvl4pPr marL="1371600" indent="0">
-                    <a:defRPr sz="1100">
-                      <a:solidFill>
-                        <a:schemeClr val="dk1"/>
-                      </a:solidFill>
-                      <a:latin typeface="+mn-lt"/>
-                      <a:ea typeface="+mn-ea"/>
-                      <a:cs typeface="+mn-cs"/>
-                    </a:defRPr>
-                  </a:lvl4pPr>
-                  <a:lvl5pPr marL="1828800" indent="0">
-                    <a:defRPr sz="1100">
-                      <a:solidFill>
-                        <a:schemeClr val="dk1"/>
-                      </a:solidFill>
-                      <a:latin typeface="+mn-lt"/>
-                      <a:ea typeface="+mn-ea"/>
-                      <a:cs typeface="+mn-cs"/>
-                    </a:defRPr>
-                  </a:lvl5pPr>
-                  <a:lvl6pPr marL="2286000" indent="0">
-                    <a:defRPr sz="1100">
-                      <a:solidFill>
-                        <a:schemeClr val="dk1"/>
-                      </a:solidFill>
-                      <a:latin typeface="+mn-lt"/>
-                      <a:ea typeface="+mn-ea"/>
-                      <a:cs typeface="+mn-cs"/>
-                    </a:defRPr>
-                  </a:lvl6pPr>
-                  <a:lvl7pPr marL="2743200" indent="0">
-                    <a:defRPr sz="1100">
-                      <a:solidFill>
-                        <a:schemeClr val="dk1"/>
-                      </a:solidFill>
-                      <a:latin typeface="+mn-lt"/>
-                      <a:ea typeface="+mn-ea"/>
-                      <a:cs typeface="+mn-cs"/>
-                    </a:defRPr>
-                  </a:lvl7pPr>
-                  <a:lvl8pPr marL="3200400" indent="0">
-                    <a:defRPr sz="1100">
-                      <a:solidFill>
-                        <a:schemeClr val="dk1"/>
-                      </a:solidFill>
-                      <a:latin typeface="+mn-lt"/>
-                      <a:ea typeface="+mn-ea"/>
-                      <a:cs typeface="+mn-cs"/>
-                    </a:defRPr>
-                  </a:lvl8pPr>
-                  <a:lvl9pPr marL="3657600" indent="0">
-                    <a:defRPr sz="1100">
-                      <a:solidFill>
-                        <a:schemeClr val="dk1"/>
-                      </a:solidFill>
-                      <a:latin typeface="+mn-lt"/>
-                      <a:ea typeface="+mn-ea"/>
-                      <a:cs typeface="+mn-cs"/>
-                    </a:defRPr>
-                  </a:lvl9pPr>
-                </a:lstStyle>
-                <a:p>
-                  <a:pPr algn="ctr"/>
-                  <a:r>
-                    <a:rPr lang="en-US" sz="2000" b="1" dirty="0">
-                      <a:solidFill>
-                        <a:schemeClr val="tx2"/>
-                      </a:solidFill>
-                      <a:latin typeface="Tahoma" pitchFamily="34" charset="0"/>
-                      <a:ea typeface="Tahoma" pitchFamily="34" charset="0"/>
-                      <a:cs typeface="Tahoma" pitchFamily="34" charset="0"/>
-                    </a:rPr>
-                    <a:t>Integrated</a:t>
-                  </a:r>
-                </a:p>
-                <a:p>
-                  <a:pPr algn="ctr"/>
-                  <a:r>
-                    <a:rPr lang="en-US" sz="2000" b="1" dirty="0">
-                      <a:solidFill>
-                        <a:schemeClr val="tx2"/>
-                      </a:solidFill>
-                      <a:latin typeface="Tahoma" pitchFamily="34" charset="0"/>
-                      <a:ea typeface="Tahoma" pitchFamily="34" charset="0"/>
-                      <a:cs typeface="Tahoma" pitchFamily="34" charset="0"/>
-                    </a:rPr>
-                    <a:t>Solution</a:t>
-                  </a:r>
-                </a:p>
-              </p:txBody>
-            </p:sp>
-          </p:grpSp>
-        </p:grpSp>
-        <p:cxnSp>
-          <p:nvCxnSpPr>
-            <p:cNvPr id="6" name="Straight Arrow Connector 5">
-              <a:extLst>
-                <a:ext uri="{FF2B5EF4-FFF2-40B4-BE49-F238E27FC236}">
-                  <a16:creationId xmlns:a16="http://schemas.microsoft.com/office/drawing/2014/main" id="{670E31FD-1312-0FDC-3323-208BC668ECDB}"/>
-                </a:ext>
-              </a:extLst>
-            </p:cNvPr>
-            <p:cNvCxnSpPr/>
-            <p:nvPr/>
-          </p:nvCxnSpPr>
-          <p:spPr>
-            <a:xfrm>
-              <a:off x="3312812" y="12355547"/>
-              <a:ext cx="1" cy="1584176"/>
-            </a:xfrm>
-            <a:prstGeom prst="straightConnector1">
-              <a:avLst/>
-            </a:prstGeom>
-            <a:ln w="57150">
-              <a:solidFill>
-                <a:schemeClr val="tx1"/>
-              </a:solidFill>
-              <a:tailEnd type="arrow"/>
-            </a:ln>
-          </p:spPr>
-          <p:style>
-            <a:lnRef idx="1">
-              <a:schemeClr val="accent1"/>
-            </a:lnRef>
-            <a:fillRef idx="0">
-              <a:schemeClr val="accent1"/>
-            </a:fillRef>
-            <a:effectRef idx="0">
-              <a:schemeClr val="accent1"/>
-            </a:effectRef>
-            <a:fontRef idx="minor">
-              <a:schemeClr val="tx1"/>
-            </a:fontRef>
-          </p:style>
-        </p:cxnSp>
-        <p:cxnSp>
-          <p:nvCxnSpPr>
-            <p:cNvPr id="19" name="Straight Connector 18">
-              <a:extLst>
-                <a:ext uri="{FF2B5EF4-FFF2-40B4-BE49-F238E27FC236}">
-                  <a16:creationId xmlns:a16="http://schemas.microsoft.com/office/drawing/2014/main" id="{0416AB92-0152-E415-DB26-33EC5EAF0CFE}"/>
-                </a:ext>
-              </a:extLst>
-            </p:cNvPr>
-            <p:cNvCxnSpPr/>
-            <p:nvPr/>
-          </p:nvCxnSpPr>
-          <p:spPr bwMode="auto">
-            <a:xfrm flipV="1">
-              <a:off x="3312812" y="12312699"/>
-              <a:ext cx="4070092" cy="42848"/>
-            </a:xfrm>
-            <a:prstGeom prst="line">
-              <a:avLst/>
-            </a:prstGeom>
-            <a:solidFill>
-              <a:schemeClr val="accent1"/>
-            </a:solidFill>
-            <a:ln w="57150" cap="flat" cmpd="sng" algn="ctr">
-              <a:solidFill>
-                <a:schemeClr val="tx1"/>
-              </a:solidFill>
-              <a:prstDash val="solid"/>
-              <a:round/>
-              <a:headEnd type="none" w="med" len="med"/>
-              <a:tailEnd type="none" w="med" len="med"/>
-            </a:ln>
-            <a:effectLst/>
-            <a:extLst>
-              <a:ext uri="{AF507438-7753-43E0-B8FC-AC1667EBCBE1}">
-                <a14:hiddenEffects xmlns:a14="http://schemas.microsoft.com/office/drawing/2010/main">
-                  <a:effectLst>
-                    <a:outerShdw dist="35921" dir="2700000" algn="ctr" rotWithShape="0">
-                      <a:schemeClr val="bg2"/>
-                    </a:outerShdw>
-                  </a:effectLst>
-                </a14:hiddenEffects>
-              </a:ext>
-            </a:extLst>
-          </p:spPr>
-        </p:cxnSp>
-      </p:grpSp>
-      <p:pic>
-        <p:nvPicPr>
-          <p:cNvPr id="39" name="תמונה 38" descr="D:\Users\Roi\Downloads\allattenuationC7.png">
-            <a:extLst>
-              <a:ext uri="{FF2B5EF4-FFF2-40B4-BE49-F238E27FC236}">
-                <a16:creationId xmlns:a16="http://schemas.microsoft.com/office/drawing/2014/main" id="{060BFD1D-0963-EAD1-142A-34A4084B8BE3}"/>
-              </a:ext>
-            </a:extLst>
-          </p:cNvPr>
-          <p:cNvPicPr>
-            <a:picLocks noChangeAspect="1"/>
-          </p:cNvPicPr>
-          <p:nvPr/>
-        </p:nvPicPr>
-        <p:blipFill>
-          <a:blip r:embed="rId6" cstate="print">
-            <a:extLst>
-              <a:ext uri="{28A0092B-C50C-407E-A947-70E740481C1C}">
-                <a14:useLocalDpi xmlns:a14="http://schemas.microsoft.com/office/drawing/2010/main" val="0"/>
-              </a:ext>
-            </a:extLst>
-          </a:blip>
-          <a:srcRect/>
-          <a:stretch>
-            <a:fillRect/>
-          </a:stretch>
-        </p:blipFill>
-        <p:spPr bwMode="auto">
-          <a:xfrm>
-            <a:off x="13706667" y="17139257"/>
-            <a:ext cx="8455914" cy="6290501"/>
-          </a:xfrm>
-          <a:prstGeom prst="rect">
-            <a:avLst/>
-          </a:prstGeom>
-          <a:noFill/>
-          <a:ln>
-            <a:noFill/>
-          </a:ln>
-        </p:spPr>
-      </p:pic>
       <p:pic>
         <p:nvPicPr>
           <p:cNvPr id="41" name="תמונה 36">
@@ -6440,6 +5367,66 @@
           </a:p>
         </p:txBody>
       </p:sp>
+      <p:pic>
+        <p:nvPicPr>
+          <p:cNvPr id="16" name="Picture 15">
+            <a:extLst>
+              <a:ext uri="{FF2B5EF4-FFF2-40B4-BE49-F238E27FC236}">
+                <a16:creationId xmlns:a16="http://schemas.microsoft.com/office/drawing/2014/main" id="{04C5F3C9-EC7F-7F8B-E427-D63B561A8C32}"/>
+              </a:ext>
+            </a:extLst>
+          </p:cNvPr>
+          <p:cNvPicPr>
+            <a:picLocks noChangeAspect="1"/>
+          </p:cNvPicPr>
+          <p:nvPr/>
+        </p:nvPicPr>
+        <p:blipFill>
+          <a:blip r:embed="rId10"/>
+          <a:stretch>
+            <a:fillRect/>
+          </a:stretch>
+        </p:blipFill>
+        <p:spPr>
+          <a:xfrm>
+            <a:off x="657299" y="14981566"/>
+            <a:ext cx="11324335" cy="3386013"/>
+          </a:xfrm>
+          <a:prstGeom prst="rect">
+            <a:avLst/>
+          </a:prstGeom>
+        </p:spPr>
+      </p:pic>
+      <p:pic>
+        <p:nvPicPr>
+          <p:cNvPr id="28" name="Picture 27">
+            <a:extLst>
+              <a:ext uri="{FF2B5EF4-FFF2-40B4-BE49-F238E27FC236}">
+                <a16:creationId xmlns:a16="http://schemas.microsoft.com/office/drawing/2014/main" id="{B166E2BD-4976-6DCE-A794-FD2063C3F715}"/>
+              </a:ext>
+            </a:extLst>
+          </p:cNvPr>
+          <p:cNvPicPr>
+            <a:picLocks noChangeAspect="1"/>
+          </p:cNvPicPr>
+          <p:nvPr/>
+        </p:nvPicPr>
+        <p:blipFill>
+          <a:blip r:embed="rId11"/>
+          <a:stretch>
+            <a:fillRect/>
+          </a:stretch>
+        </p:blipFill>
+        <p:spPr>
+          <a:xfrm>
+            <a:off x="13706667" y="5611271"/>
+            <a:ext cx="8118863" cy="5329470"/>
+          </a:xfrm>
+          <a:prstGeom prst="rect">
+            <a:avLst/>
+          </a:prstGeom>
+        </p:spPr>
+      </p:pic>
     </p:spTree>
     <p:extLst>
       <p:ext uri="{BB962C8B-B14F-4D97-AF65-F5344CB8AC3E}">
@@ -6769,23 +5756,6 @@
 </file>
 
 <file path=customXml/item1.xml><?xml version="1.0" encoding="utf-8"?>
-<?mso-contentType ?>
-<FormTemplates xmlns="http://schemas.microsoft.com/sharepoint/v3/contenttype/forms">
-  <Display>DocumentLibraryForm</Display>
-  <Edit>DocumentLibraryForm</Edit>
-  <New>DocumentLibraryForm</New>
-</FormTemplates>
-</file>
-
-<file path=customXml/item2.xml><?xml version="1.0" encoding="utf-8"?>
-<p:properties xmlns:p="http://schemas.microsoft.com/office/2006/metadata/properties" xmlns:xsi="http://www.w3.org/2001/XMLSchema-instance" xmlns:pc="http://schemas.microsoft.com/office/infopath/2007/PartnerControls">
-  <documentManagement>
-    <_activity xmlns="844e0735-f53f-4baa-bd75-b10ae3a2bbdb" xsi:nil="true"/>
-  </documentManagement>
-</p:properties>
-</file>
-
-<file path=customXml/item3.xml><?xml version="1.0" encoding="utf-8"?>
 <ct:contentTypeSchema xmlns:ct="http://schemas.microsoft.com/office/2006/metadata/contentType" xmlns:ma="http://schemas.microsoft.com/office/2006/metadata/properties/metaAttributes" ct:_="" ma:_="" ma:contentTypeName="Document" ma:contentTypeID="0x01010063894B321F97984089F660A1B37BD856" ma:contentTypeVersion="8" ma:contentTypeDescription="Create a new document." ma:contentTypeScope="" ma:versionID="69f2837f18e45e11aaa12c857e6c5827">
   <xsd:schema xmlns:xsd="http://www.w3.org/2001/XMLSchema" xmlns:xs="http://www.w3.org/2001/XMLSchema" xmlns:p="http://schemas.microsoft.com/office/2006/metadata/properties" xmlns:ns3="844e0735-f53f-4baa-bd75-b10ae3a2bbdb" targetNamespace="http://schemas.microsoft.com/office/2006/metadata/properties" ma:root="true" ma:fieldsID="44cfe3dd05ba74ef950c29cbe3f766ab" ns3:_="">
     <xsd:import namespace="844e0735-f53f-4baa-bd75-b10ae3a2bbdb"/>
@@ -6955,10 +5925,37 @@
 </ct:contentTypeSchema>
 </file>
 
+<file path=customXml/item2.xml><?xml version="1.0" encoding="utf-8"?>
+<p:properties xmlns:p="http://schemas.microsoft.com/office/2006/metadata/properties" xmlns:xsi="http://www.w3.org/2001/XMLSchema-instance" xmlns:pc="http://schemas.microsoft.com/office/infopath/2007/PartnerControls">
+  <documentManagement>
+    <_activity xmlns="844e0735-f53f-4baa-bd75-b10ae3a2bbdb" xsi:nil="true"/>
+  </documentManagement>
+</p:properties>
+</file>
+
+<file path=customXml/item3.xml><?xml version="1.0" encoding="utf-8"?>
+<?mso-contentType ?>
+<FormTemplates xmlns="http://schemas.microsoft.com/sharepoint/v3/contenttype/forms">
+  <Display>DocumentLibraryForm</Display>
+  <Edit>DocumentLibraryForm</Edit>
+  <New>DocumentLibraryForm</New>
+</FormTemplates>
+</file>
+
 <file path=customXml/itemProps1.xml><?xml version="1.0" encoding="utf-8"?>
-<ds:datastoreItem xmlns:ds="http://schemas.openxmlformats.org/officeDocument/2006/customXml" ds:itemID="{DAADE9C2-8609-4046-AFB7-2D78D2E3679D}">
+<ds:datastoreItem xmlns:ds="http://schemas.openxmlformats.org/officeDocument/2006/customXml" ds:itemID="{903E978F-3A35-4737-8BBB-B7BB0C7F7EB7}">
   <ds:schemaRefs>
-    <ds:schemaRef ds:uri="http://schemas.microsoft.com/sharepoint/v3/contenttype/forms"/>
+    <ds:schemaRef ds:uri="http://schemas.microsoft.com/office/2006/metadata/contentType"/>
+    <ds:schemaRef ds:uri="http://schemas.microsoft.com/office/2006/metadata/properties/metaAttributes"/>
+    <ds:schemaRef ds:uri="http://www.w3.org/2001/XMLSchema"/>
+    <ds:schemaRef ds:uri="http://schemas.microsoft.com/office/2006/metadata/properties"/>
+    <ds:schemaRef ds:uri="844e0735-f53f-4baa-bd75-b10ae3a2bbdb"/>
+    <ds:schemaRef ds:uri="http://schemas.microsoft.com/office/2006/documentManagement/types"/>
+    <ds:schemaRef ds:uri="http://schemas.microsoft.com/office/infopath/2007/PartnerControls"/>
+    <ds:schemaRef ds:uri="http://schemas.openxmlformats.org/package/2006/metadata/core-properties"/>
+    <ds:schemaRef ds:uri="http://purl.org/dc/elements/1.1/"/>
+    <ds:schemaRef ds:uri="http://purl.org/dc/terms/"/>
+    <ds:schemaRef ds:uri="http://schemas.microsoft.com/internal/obd"/>
   </ds:schemaRefs>
 </ds:datastoreItem>
 </file>
@@ -6980,19 +5977,9 @@
 </file>
 
 <file path=customXml/itemProps3.xml><?xml version="1.0" encoding="utf-8"?>
-<ds:datastoreItem xmlns:ds="http://schemas.openxmlformats.org/officeDocument/2006/customXml" ds:itemID="{903E978F-3A35-4737-8BBB-B7BB0C7F7EB7}">
+<ds:datastoreItem xmlns:ds="http://schemas.openxmlformats.org/officeDocument/2006/customXml" ds:itemID="{DAADE9C2-8609-4046-AFB7-2D78D2E3679D}">
   <ds:schemaRefs>
-    <ds:schemaRef ds:uri="http://schemas.microsoft.com/office/2006/metadata/contentType"/>
-    <ds:schemaRef ds:uri="http://schemas.microsoft.com/office/2006/metadata/properties/metaAttributes"/>
-    <ds:schemaRef ds:uri="http://www.w3.org/2001/XMLSchema"/>
-    <ds:schemaRef ds:uri="http://schemas.microsoft.com/office/2006/metadata/properties"/>
-    <ds:schemaRef ds:uri="844e0735-f53f-4baa-bd75-b10ae3a2bbdb"/>
-    <ds:schemaRef ds:uri="http://schemas.microsoft.com/office/2006/documentManagement/types"/>
-    <ds:schemaRef ds:uri="http://schemas.microsoft.com/office/infopath/2007/PartnerControls"/>
-    <ds:schemaRef ds:uri="http://schemas.openxmlformats.org/package/2006/metadata/core-properties"/>
-    <ds:schemaRef ds:uri="http://purl.org/dc/elements/1.1/"/>
-    <ds:schemaRef ds:uri="http://purl.org/dc/terms/"/>
-    <ds:schemaRef ds:uri="http://schemas.microsoft.com/internal/obd"/>
+    <ds:schemaRef ds:uri="http://schemas.microsoft.com/sharepoint/v3/contenttype/forms"/>
   </ds:schemaRefs>
 </ds:datastoreItem>
 </file>